--- a/presentation/Audio2Tool_Interspeech2026_Oral.pptx
+++ b/presentation/Audio2Tool_Interspeech2026_Oral.pptx
@@ -26,9 +26,10 @@
     <p:sldId id="274" r:id="rId20"/>
     <p:sldId id="275" r:id="rId21"/>
     <p:sldId id="276" r:id="rId22"/>
+    <p:sldId id="277" r:id="rId23"/>
   </p:sldIdLst>
   <p:notesMasterIdLst>
-    <p:notesMasterId r:id="rId23"/>
+    <p:notesMasterId r:id="rId24"/>
   </p:notesMasterIdLst>
   <p:sldSz cx="12192000" cy="6858000"/>
   <p:notesSz cx="6858000" cy="12192000"/>
@@ -4748,6 +4749,94 @@
             <a:fld id="{F7021451-1387-4CA6-816F-3879F97B5CBC}" type="slidenum">
               <a:rPr lang="en-US"/>
               <a:t>21</a:t>
+            </a:fld>
+            <a:endParaRPr lang="en-US"/>
+          </a:p>
+        </p:txBody>
+      </p:sp>
+    </p:spTree>
+    <p:extLst>
+      <p:ext uri="{BB962C8B-B14F-4D97-AF65-F5344CB8AC3E}">
+        <p14:creationId xmlns:p14="http://schemas.microsoft.com/office/powerpoint/2010/main" val="1024086991"/>
+      </p:ext>
+    </p:extLst>
+  </p:cSld>
+  <p:clrMapOvr>
+    <a:masterClrMapping/>
+  </p:clrMapOvr>
+</p:notes>
+</file>
+
+<file path=ppt/notesSlides/notesSlide22.xml><?xml version="1.0" encoding="utf-8"?>
+<p:notes xmlns:a="http://schemas.openxmlformats.org/drawingml/2006/main" xmlns:r="http://schemas.openxmlformats.org/officeDocument/2006/relationships" xmlns:p="http://schemas.openxmlformats.org/presentationml/2006/main">
+  <p:cSld>
+    <p:spTree>
+      <p:nvGrpSpPr>
+        <p:cNvPr id="1" name=""/>
+        <p:cNvGrpSpPr/>
+        <p:nvPr/>
+      </p:nvGrpSpPr>
+      <p:grpSpPr>
+        <a:xfrm>
+          <a:off x="0" y="0"/>
+          <a:ext cx="0" cy="0"/>
+          <a:chOff x="0" y="0"/>
+          <a:chExt cx="0" cy="0"/>
+        </a:xfrm>
+      </p:grpSpPr>
+      <p:sp>
+        <p:nvSpPr>
+          <p:cNvPr id="2" name="Slide Image Placeholder 1"/>
+          <p:cNvSpPr>
+            <a:spLocks noGrp="1" noRot="1" noChangeAspect="1"/>
+          </p:cNvSpPr>
+          <p:nvPr>
+            <p:ph type="sldImg"/>
+          </p:nvPr>
+        </p:nvSpPr>
+        <p:spPr/>
+      </p:sp>
+      <p:sp>
+        <p:nvSpPr>
+          <p:cNvPr id="3" name="Notes Placeholder 2"/>
+          <p:cNvSpPr>
+            <a:spLocks noGrp="1"/>
+          </p:cNvSpPr>
+          <p:nvPr>
+            <p:ph type="body" idx="1"/>
+          </p:nvPr>
+        </p:nvSpPr>
+        <p:spPr/>
+        <p:txBody>
+          <a:bodyPr/>
+          <a:lstStyle/>
+          <a:p>
+            <a:r>
+              <a:rPr lang="en-US" dirty="0"/>
+              <a:t>References cited in the paper, in the paper's numbering. Not spoken; here for the audience and for Q&amp;A.</a:t>
+            </a:r>
+            <a:endParaRPr lang="en-US" dirty="0"/>
+          </a:p>
+        </p:txBody>
+      </p:sp>
+      <p:sp>
+        <p:nvSpPr>
+          <p:cNvPr id="4" name="Slide Number Placeholder 3"/>
+          <p:cNvSpPr>
+            <a:spLocks noGrp="1"/>
+          </p:cNvSpPr>
+          <p:nvPr>
+            <p:ph type="sldNum" sz="quarter" idx="10"/>
+          </p:nvPr>
+        </p:nvSpPr>
+        <p:spPr/>
+        <p:txBody>
+          <a:bodyPr/>
+          <a:lstStyle/>
+          <a:p>
+            <a:fld id="{F7021451-1387-4CA6-816F-3879F97B5CBC}" type="slidenum">
+              <a:rPr lang="en-US"/>
+              <a:t>22</a:t>
             </a:fld>
             <a:endParaRPr lang="en-US"/>
           </a:p>
@@ -24310,6 +24399,2790 @@
 </p:sld>
 </file>
 
+<file path=ppt/slides/slide22.xml><?xml version="1.0" encoding="utf-8"?>
+<p:sld xmlns:a="http://schemas.openxmlformats.org/drawingml/2006/main" xmlns:r="http://schemas.openxmlformats.org/officeDocument/2006/relationships" xmlns:p="http://schemas.openxmlformats.org/presentationml/2006/main">
+  <p:cSld name="Slide 22">
+    <p:bg>
+      <p:bgPr>
+        <a:solidFill>
+          <a:srgbClr val="FFFFFF"/>
+        </a:solidFill>
+      </p:bgPr>
+    </p:bg>
+    <p:spTree>
+      <p:nvGrpSpPr>
+        <p:cNvPr id="1" name=""/>
+        <p:cNvGrpSpPr/>
+        <p:nvPr/>
+      </p:nvGrpSpPr>
+      <p:grpSpPr>
+        <a:xfrm>
+          <a:off x="0" y="0"/>
+          <a:ext cx="0" cy="0"/>
+          <a:chOff x="0" y="0"/>
+          <a:chExt cx="0" cy="0"/>
+        </a:xfrm>
+      </p:grpSpPr>
+      <p:sp>
+        <p:nvSpPr>
+          <p:cNvPr id="2" name="Text 0"/>
+          <p:cNvSpPr txBox="1"/>
+          <p:nvPr/>
+        </p:nvSpPr>
+        <p:spPr>
+          <a:xfrm>
+            <a:off x="548640" y="310896"/>
+            <a:ext cx="7315200" cy="274320"/>
+          </a:xfrm>
+          <a:prstGeom prst="rect">
+            <a:avLst/>
+          </a:prstGeom>
+          <a:noFill/>
+          <a:ln/>
+        </p:spPr>
+        <p:txBody>
+          <a:bodyPr wrap="square" lIns="0" tIns="0" rIns="0" bIns="0" rtlCol="0" anchor="t"/>
+          <a:lstStyle/>
+          <a:p>
+            <a:pPr indent="0" marL="0">
+              <a:buNone/>
+            </a:pPr>
+            <a:r>
+              <a:rPr lang="en-US" sz="1200" b="1" spc="300" kern="0" dirty="0">
+                <a:solidFill>
+                  <a:srgbClr val="5B6B7F"/>
+                </a:solidFill>
+                <a:latin typeface="Calibri" pitchFamily="34" charset="0"/>
+                <a:ea typeface="Calibri" pitchFamily="34" charset="-122"/>
+                <a:cs typeface="Calibri" pitchFamily="34" charset="-120"/>
+              </a:rPr>
+              <a:t>REFERENCES</a:t>
+            </a:r>
+            <a:endParaRPr lang="en-US" sz="1200" dirty="0"/>
+          </a:p>
+        </p:txBody>
+      </p:sp>
+      <p:sp>
+        <p:nvSpPr>
+          <p:cNvPr id="3" name="Text 1"/>
+          <p:cNvSpPr txBox="1"/>
+          <p:nvPr/>
+        </p:nvSpPr>
+        <p:spPr>
+          <a:xfrm>
+            <a:off x="548640" y="548640"/>
+            <a:ext cx="10332720" cy="914400"/>
+          </a:xfrm>
+          <a:prstGeom prst="rect">
+            <a:avLst/>
+          </a:prstGeom>
+          <a:noFill/>
+          <a:ln/>
+        </p:spPr>
+        <p:txBody>
+          <a:bodyPr wrap="square" lIns="0" tIns="0" rIns="0" bIns="0" rtlCol="0" anchor="t"/>
+          <a:lstStyle/>
+          <a:p>
+            <a:pPr indent="0" marL="0">
+              <a:buNone/>
+            </a:pPr>
+            <a:r>
+              <a:rPr lang="en-US" sz="2800" b="1" dirty="0">
+                <a:solidFill>
+                  <a:srgbClr val="0F1B2D"/>
+                </a:solidFill>
+                <a:latin typeface="Calibri" pitchFamily="34" charset="0"/>
+                <a:ea typeface="Calibri" pitchFamily="34" charset="-122"/>
+                <a:cs typeface="Calibri" pitchFamily="34" charset="-120"/>
+              </a:rPr>
+              <a:t>References</a:t>
+            </a:r>
+            <a:endParaRPr lang="en-US" sz="2800" dirty="0"/>
+          </a:p>
+        </p:txBody>
+      </p:sp>
+      <p:sp>
+        <p:nvSpPr>
+          <p:cNvPr id="4" name="Shape 2"/>
+          <p:cNvSpPr/>
+          <p:nvPr/>
+        </p:nvSpPr>
+        <p:spPr>
+          <a:xfrm>
+            <a:off x="11018520" y="536296"/>
+            <a:ext cx="50189" cy="134417"/>
+          </a:xfrm>
+          <a:prstGeom prst="roundRect">
+            <a:avLst>
+              <a:gd name="adj" fmla="val 50000"/>
+            </a:avLst>
+          </a:prstGeom>
+          <a:solidFill>
+            <a:srgbClr val="0FA3B1"/>
+          </a:solidFill>
+          <a:ln w="12700">
+            <a:solidFill>
+              <a:srgbClr val="0FA3B1"/>
+            </a:solidFill>
+            <a:prstDash val="solid"/>
+          </a:ln>
+        </p:spPr>
+      </p:sp>
+      <p:sp>
+        <p:nvSpPr>
+          <p:cNvPr id="5" name="Shape 3"/>
+          <p:cNvSpPr/>
+          <p:nvPr/>
+        </p:nvSpPr>
+        <p:spPr>
+          <a:xfrm>
+            <a:off x="11116835" y="469087"/>
+            <a:ext cx="50189" cy="268834"/>
+          </a:xfrm>
+          <a:prstGeom prst="roundRect">
+            <a:avLst>
+              <a:gd name="adj" fmla="val 50000"/>
+            </a:avLst>
+          </a:prstGeom>
+          <a:solidFill>
+            <a:srgbClr val="0FA3B1"/>
+          </a:solidFill>
+          <a:ln w="12700">
+            <a:solidFill>
+              <a:srgbClr val="0FA3B1"/>
+            </a:solidFill>
+            <a:prstDash val="solid"/>
+          </a:ln>
+        </p:spPr>
+      </p:sp>
+      <p:sp>
+        <p:nvSpPr>
+          <p:cNvPr id="6" name="Shape 4"/>
+          <p:cNvSpPr/>
+          <p:nvPr/>
+        </p:nvSpPr>
+        <p:spPr>
+          <a:xfrm>
+            <a:off x="11215150" y="411480"/>
+            <a:ext cx="50189" cy="384048"/>
+          </a:xfrm>
+          <a:prstGeom prst="roundRect">
+            <a:avLst>
+              <a:gd name="adj" fmla="val 50000"/>
+            </a:avLst>
+          </a:prstGeom>
+          <a:solidFill>
+            <a:srgbClr val="0FA3B1"/>
+          </a:solidFill>
+          <a:ln w="12700">
+            <a:solidFill>
+              <a:srgbClr val="0FA3B1"/>
+            </a:solidFill>
+            <a:prstDash val="solid"/>
+          </a:ln>
+        </p:spPr>
+      </p:sp>
+      <p:sp>
+        <p:nvSpPr>
+          <p:cNvPr id="7" name="Shape 5"/>
+          <p:cNvSpPr/>
+          <p:nvPr/>
+        </p:nvSpPr>
+        <p:spPr>
+          <a:xfrm>
+            <a:off x="11313466" y="488290"/>
+            <a:ext cx="50189" cy="230429"/>
+          </a:xfrm>
+          <a:prstGeom prst="roundRect">
+            <a:avLst>
+              <a:gd name="adj" fmla="val 50000"/>
+            </a:avLst>
+          </a:prstGeom>
+          <a:solidFill>
+            <a:srgbClr val="0FA3B1"/>
+          </a:solidFill>
+          <a:ln w="12700">
+            <a:solidFill>
+              <a:srgbClr val="0FA3B1"/>
+            </a:solidFill>
+            <a:prstDash val="solid"/>
+          </a:ln>
+        </p:spPr>
+      </p:sp>
+      <p:sp>
+        <p:nvSpPr>
+          <p:cNvPr id="8" name="Shape 6"/>
+          <p:cNvSpPr/>
+          <p:nvPr/>
+        </p:nvSpPr>
+        <p:spPr>
+          <a:xfrm>
+            <a:off x="11411781" y="440284"/>
+            <a:ext cx="50189" cy="326441"/>
+          </a:xfrm>
+          <a:prstGeom prst="roundRect">
+            <a:avLst>
+              <a:gd name="adj" fmla="val 50000"/>
+            </a:avLst>
+          </a:prstGeom>
+          <a:solidFill>
+            <a:srgbClr val="0FA3B1"/>
+          </a:solidFill>
+          <a:ln w="12700">
+            <a:solidFill>
+              <a:srgbClr val="0FA3B1"/>
+            </a:solidFill>
+            <a:prstDash val="solid"/>
+          </a:ln>
+        </p:spPr>
+      </p:sp>
+      <p:sp>
+        <p:nvSpPr>
+          <p:cNvPr id="9" name="Shape 7"/>
+          <p:cNvSpPr/>
+          <p:nvPr/>
+        </p:nvSpPr>
+        <p:spPr>
+          <a:xfrm>
+            <a:off x="11510096" y="517093"/>
+            <a:ext cx="50189" cy="172822"/>
+          </a:xfrm>
+          <a:prstGeom prst="roundRect">
+            <a:avLst>
+              <a:gd name="adj" fmla="val 50000"/>
+            </a:avLst>
+          </a:prstGeom>
+          <a:solidFill>
+            <a:srgbClr val="0FA3B1"/>
+          </a:solidFill>
+          <a:ln w="12700">
+            <a:solidFill>
+              <a:srgbClr val="0FA3B1"/>
+            </a:solidFill>
+            <a:prstDash val="solid"/>
+          </a:ln>
+        </p:spPr>
+      </p:sp>
+      <p:sp>
+        <p:nvSpPr>
+          <p:cNvPr id="10" name="Shape 8"/>
+          <p:cNvSpPr/>
+          <p:nvPr/>
+        </p:nvSpPr>
+        <p:spPr>
+          <a:xfrm>
+            <a:off x="11608411" y="555498"/>
+            <a:ext cx="50189" cy="96012"/>
+          </a:xfrm>
+          <a:prstGeom prst="roundRect">
+            <a:avLst>
+              <a:gd name="adj" fmla="val 50000"/>
+            </a:avLst>
+          </a:prstGeom>
+          <a:solidFill>
+            <a:srgbClr val="0FA3B1"/>
+          </a:solidFill>
+          <a:ln w="12700">
+            <a:solidFill>
+              <a:srgbClr val="0FA3B1"/>
+            </a:solidFill>
+            <a:prstDash val="solid"/>
+          </a:ln>
+        </p:spPr>
+      </p:sp>
+      <p:sp>
+        <p:nvSpPr>
+          <p:cNvPr id="11" name="Text 9"/>
+          <p:cNvSpPr txBox="1"/>
+          <p:nvPr/>
+        </p:nvSpPr>
+        <p:spPr>
+          <a:xfrm>
+            <a:off x="548640" y="6473952"/>
+            <a:ext cx="6400800" cy="256032"/>
+          </a:xfrm>
+          <a:prstGeom prst="rect">
+            <a:avLst/>
+          </a:prstGeom>
+          <a:noFill/>
+          <a:ln/>
+        </p:spPr>
+        <p:txBody>
+          <a:bodyPr wrap="square" lIns="0" tIns="0" rIns="0" bIns="0" rtlCol="0" anchor="t"/>
+          <a:lstStyle/>
+          <a:p>
+            <a:pPr indent="0" marL="0">
+              <a:buNone/>
+            </a:pPr>
+            <a:r>
+              <a:rPr lang="en-US" sz="1000" dirty="0">
+                <a:solidFill>
+                  <a:srgbClr val="8A97A8"/>
+                </a:solidFill>
+                <a:latin typeface="Calibri" pitchFamily="34" charset="0"/>
+                <a:ea typeface="Calibri" pitchFamily="34" charset="-122"/>
+                <a:cs typeface="Calibri" pitchFamily="34" charset="-120"/>
+              </a:rPr>
+              <a:t>Audio2Tool  ·  Interspeech 2026  ·  Sydney</a:t>
+            </a:r>
+            <a:endParaRPr lang="en-US" sz="1000" dirty="0"/>
+          </a:p>
+        </p:txBody>
+      </p:sp>
+      <p:sp>
+        <p:nvSpPr>
+          <p:cNvPr id="12" name="Text 10"/>
+          <p:cNvSpPr txBox="1"/>
+          <p:nvPr/>
+        </p:nvSpPr>
+        <p:spPr>
+          <a:xfrm>
+            <a:off x="11109960" y="6473952"/>
+            <a:ext cx="530352" cy="256032"/>
+          </a:xfrm>
+          <a:prstGeom prst="rect">
+            <a:avLst/>
+          </a:prstGeom>
+          <a:noFill/>
+          <a:ln/>
+        </p:spPr>
+        <p:txBody>
+          <a:bodyPr wrap="square" lIns="0" tIns="0" rIns="0" bIns="0" rtlCol="0" anchor="t"/>
+          <a:lstStyle/>
+          <a:p>
+            <a:pPr algn="r" indent="0" marL="0">
+              <a:buNone/>
+            </a:pPr>
+            <a:r>
+              <a:rPr lang="en-US" sz="1000" dirty="0">
+                <a:solidFill>
+                  <a:srgbClr val="8A97A8"/>
+                </a:solidFill>
+                <a:latin typeface="Calibri" pitchFamily="34" charset="0"/>
+                <a:ea typeface="Calibri" pitchFamily="34" charset="-122"/>
+                <a:cs typeface="Calibri" pitchFamily="34" charset="-120"/>
+              </a:rPr>
+              <a:t>22</a:t>
+            </a:r>
+            <a:endParaRPr lang="en-US" sz="1000" dirty="0"/>
+          </a:p>
+        </p:txBody>
+      </p:sp>
+      <p:sp>
+        <p:nvSpPr>
+          <p:cNvPr id="14" name="Text 11"/>
+          <p:cNvSpPr txBox="1"/>
+          <p:nvPr/>
+        </p:nvSpPr>
+        <p:spPr>
+          <a:xfrm>
+            <a:off x="548640" y="1463040"/>
+            <a:ext cx="5468112" cy="4892040"/>
+          </a:xfrm>
+          <a:prstGeom prst="rect">
+            <a:avLst/>
+          </a:prstGeom>
+          <a:noFill/>
+          <a:ln/>
+        </p:spPr>
+        <p:txBody>
+          <a:bodyPr wrap="square" lIns="0" tIns="0" rIns="0" bIns="0" rtlCol="0" anchor="t"/>
+          <a:lstStyle/>
+          <a:p>
+            <a:pPr indent="0" marL="0">
+              <a:lnSpc>
+                <a:spcPct val="105000"/>
+              </a:lnSpc>
+              <a:spcAft>
+                <a:spcPts val="300"/>
+              </a:spcAft>
+              <a:buNone/>
+            </a:pPr>
+            <a:r>
+              <a:rPr lang="en-US" sz="950" b="1" dirty="0">
+                <a:solidFill>
+                  <a:srgbClr val="0B7F8A"/>
+                </a:solidFill>
+                <a:latin typeface="Calibri" pitchFamily="34" charset="0"/>
+                <a:ea typeface="Calibri" pitchFamily="34" charset="-122"/>
+                <a:cs typeface="Calibri" pitchFamily="34" charset="-120"/>
+              </a:rPr>
+              <a:t>[1]  </a:t>
+            </a:r>
+            <a:pPr indent="0" marL="0">
+              <a:lnSpc>
+                <a:spcPct val="105000"/>
+              </a:lnSpc>
+              <a:spcAft>
+                <a:spcPts val="300"/>
+              </a:spcAft>
+              <a:buNone/>
+            </a:pPr>
+            <a:r>
+              <a:rPr lang="en-US" sz="950" dirty="0">
+                <a:solidFill>
+                  <a:srgbClr val="1B2A41"/>
+                </a:solidFill>
+                <a:latin typeface="Calibri" pitchFamily="34" charset="0"/>
+                <a:ea typeface="Calibri" pitchFamily="34" charset="-122"/>
+                <a:cs typeface="Calibri" pitchFamily="34" charset="-120"/>
+              </a:rPr>
+              <a:t>Chen, Yue, Zhang, Gao, Tan, Li. </a:t>
+            </a:r>
+            <a:pPr indent="0" marL="0">
+              <a:lnSpc>
+                <a:spcPct val="105000"/>
+              </a:lnSpc>
+              <a:spcAft>
+                <a:spcPts val="300"/>
+              </a:spcAft>
+              <a:buNone/>
+            </a:pPr>
+            <a:r>
+              <a:rPr lang="en-US" sz="950" dirty="0">
+                <a:solidFill>
+                  <a:srgbClr val="0F1B2D"/>
+                </a:solidFill>
+                <a:latin typeface="Calibri" pitchFamily="34" charset="0"/>
+                <a:ea typeface="Calibri" pitchFamily="34" charset="-122"/>
+                <a:cs typeface="Calibri" pitchFamily="34" charset="-120"/>
+              </a:rPr>
+              <a:t>VoiceBench: Benchmarking LLM-based voice assistants. </a:t>
+            </a:r>
+            <a:pPr indent="0" marL="0">
+              <a:lnSpc>
+                <a:spcPct val="105000"/>
+              </a:lnSpc>
+              <a:spcAft>
+                <a:spcPts val="300"/>
+              </a:spcAft>
+              <a:buNone/>
+            </a:pPr>
+            <a:r>
+              <a:rPr lang="en-US" sz="950" i="1" dirty="0">
+                <a:solidFill>
+                  <a:srgbClr val="5B6B7F"/>
+                </a:solidFill>
+                <a:latin typeface="Calibri" pitchFamily="34" charset="0"/>
+                <a:ea typeface="Calibri" pitchFamily="34" charset="-122"/>
+                <a:cs typeface="Calibri" pitchFamily="34" charset="-120"/>
+              </a:rPr>
+              <a:t>arXiv:2410.17196, 2024</a:t>
+            </a:r>
+            <a:endParaRPr lang="en-US" sz="950" dirty="0"/>
+          </a:p>
+          <a:p>
+            <a:pPr indent="0" marL="0">
+              <a:lnSpc>
+                <a:spcPct val="105000"/>
+              </a:lnSpc>
+              <a:spcAft>
+                <a:spcPts val="300"/>
+              </a:spcAft>
+              <a:buNone/>
+            </a:pPr>
+            <a:r>
+              <a:rPr lang="en-US" sz="950" b="1" dirty="0">
+                <a:solidFill>
+                  <a:srgbClr val="0B7F8A"/>
+                </a:solidFill>
+                <a:latin typeface="Calibri" pitchFamily="34" charset="0"/>
+                <a:ea typeface="Calibri" pitchFamily="34" charset="-122"/>
+                <a:cs typeface="Calibri" pitchFamily="34" charset="-120"/>
+              </a:rPr>
+              <a:t>[2]  </a:t>
+            </a:r>
+            <a:pPr indent="0" marL="0">
+              <a:lnSpc>
+                <a:spcPct val="105000"/>
+              </a:lnSpc>
+              <a:spcAft>
+                <a:spcPts val="300"/>
+              </a:spcAft>
+              <a:buNone/>
+            </a:pPr>
+            <a:r>
+              <a:rPr lang="en-US" sz="950" dirty="0">
+                <a:solidFill>
+                  <a:srgbClr val="1B2A41"/>
+                </a:solidFill>
+                <a:latin typeface="Calibri" pitchFamily="34" charset="0"/>
+                <a:ea typeface="Calibri" pitchFamily="34" charset="-122"/>
+                <a:cs typeface="Calibri" pitchFamily="34" charset="-120"/>
+              </a:rPr>
+              <a:t>Zhong, Du, Zhang, Hu, Tang. </a:t>
+            </a:r>
+            <a:pPr indent="0" marL="0">
+              <a:lnSpc>
+                <a:spcPct val="105000"/>
+              </a:lnSpc>
+              <a:spcAft>
+                <a:spcPts val="300"/>
+              </a:spcAft>
+              <a:buNone/>
+            </a:pPr>
+            <a:r>
+              <a:rPr lang="en-US" sz="950" dirty="0">
+                <a:solidFill>
+                  <a:srgbClr val="0F1B2D"/>
+                </a:solidFill>
+                <a:latin typeface="Calibri" pitchFamily="34" charset="0"/>
+                <a:ea typeface="Calibri" pitchFamily="34" charset="-122"/>
+                <a:cs typeface="Calibri" pitchFamily="34" charset="-120"/>
+              </a:rPr>
+              <a:t>ComplexFuncBench: Multi-step and constrained function calling under long-context scenario. </a:t>
+            </a:r>
+            <a:pPr indent="0" marL="0">
+              <a:lnSpc>
+                <a:spcPct val="105000"/>
+              </a:lnSpc>
+              <a:spcAft>
+                <a:spcPts val="300"/>
+              </a:spcAft>
+              <a:buNone/>
+            </a:pPr>
+            <a:r>
+              <a:rPr lang="en-US" sz="950" i="1" dirty="0">
+                <a:solidFill>
+                  <a:srgbClr val="5B6B7F"/>
+                </a:solidFill>
+                <a:latin typeface="Calibri" pitchFamily="34" charset="0"/>
+                <a:ea typeface="Calibri" pitchFamily="34" charset="-122"/>
+                <a:cs typeface="Calibri" pitchFamily="34" charset="-120"/>
+              </a:rPr>
+              <a:t>arXiv:2501.10132, 2025</a:t>
+            </a:r>
+            <a:endParaRPr lang="en-US" sz="950" dirty="0"/>
+          </a:p>
+          <a:p>
+            <a:pPr indent="0" marL="0">
+              <a:lnSpc>
+                <a:spcPct val="105000"/>
+              </a:lnSpc>
+              <a:spcAft>
+                <a:spcPts val="300"/>
+              </a:spcAft>
+              <a:buNone/>
+            </a:pPr>
+            <a:r>
+              <a:rPr lang="en-US" sz="950" b="1" dirty="0">
+                <a:solidFill>
+                  <a:srgbClr val="0B7F8A"/>
+                </a:solidFill>
+                <a:latin typeface="Calibri" pitchFamily="34" charset="0"/>
+                <a:ea typeface="Calibri" pitchFamily="34" charset="-122"/>
+                <a:cs typeface="Calibri" pitchFamily="34" charset="-120"/>
+              </a:rPr>
+              <a:t>[3]  </a:t>
+            </a:r>
+            <a:pPr indent="0" marL="0">
+              <a:lnSpc>
+                <a:spcPct val="105000"/>
+              </a:lnSpc>
+              <a:spcAft>
+                <a:spcPts val="300"/>
+              </a:spcAft>
+              <a:buNone/>
+            </a:pPr>
+            <a:r>
+              <a:rPr lang="en-US" sz="950" dirty="0">
+                <a:solidFill>
+                  <a:srgbClr val="1B2A41"/>
+                </a:solidFill>
+                <a:latin typeface="Calibri" pitchFamily="34" charset="0"/>
+                <a:ea typeface="Calibri" pitchFamily="34" charset="-122"/>
+                <a:cs typeface="Calibri" pitchFamily="34" charset="-120"/>
+              </a:rPr>
+              <a:t>Patil, Mao, Yan, Ji, Suresh, Stoica, Gonzalez. </a:t>
+            </a:r>
+            <a:pPr indent="0" marL="0">
+              <a:lnSpc>
+                <a:spcPct val="105000"/>
+              </a:lnSpc>
+              <a:spcAft>
+                <a:spcPts val="300"/>
+              </a:spcAft>
+              <a:buNone/>
+            </a:pPr>
+            <a:r>
+              <a:rPr lang="en-US" sz="950" dirty="0">
+                <a:solidFill>
+                  <a:srgbClr val="0F1B2D"/>
+                </a:solidFill>
+                <a:latin typeface="Calibri" pitchFamily="34" charset="0"/>
+                <a:ea typeface="Calibri" pitchFamily="34" charset="-122"/>
+                <a:cs typeface="Calibri" pitchFamily="34" charset="-120"/>
+              </a:rPr>
+              <a:t>The Berkeley Function Calling Leaderboard (BFCL): From tool use to agentic evaluation of LLMs. </a:t>
+            </a:r>
+            <a:pPr indent="0" marL="0">
+              <a:lnSpc>
+                <a:spcPct val="105000"/>
+              </a:lnSpc>
+              <a:spcAft>
+                <a:spcPts val="300"/>
+              </a:spcAft>
+              <a:buNone/>
+            </a:pPr>
+            <a:r>
+              <a:rPr lang="en-US" sz="950" i="1" dirty="0">
+                <a:solidFill>
+                  <a:srgbClr val="5B6B7F"/>
+                </a:solidFill>
+                <a:latin typeface="Calibri" pitchFamily="34" charset="0"/>
+                <a:ea typeface="Calibri" pitchFamily="34" charset="-122"/>
+                <a:cs typeface="Calibri" pitchFamily="34" charset="-120"/>
+              </a:rPr>
+              <a:t>ICML 2025</a:t>
+            </a:r>
+            <a:endParaRPr lang="en-US" sz="950" dirty="0"/>
+          </a:p>
+          <a:p>
+            <a:pPr indent="0" marL="0">
+              <a:lnSpc>
+                <a:spcPct val="105000"/>
+              </a:lnSpc>
+              <a:spcAft>
+                <a:spcPts val="300"/>
+              </a:spcAft>
+              <a:buNone/>
+            </a:pPr>
+            <a:r>
+              <a:rPr lang="en-US" sz="950" b="1" dirty="0">
+                <a:solidFill>
+                  <a:srgbClr val="0B7F8A"/>
+                </a:solidFill>
+                <a:latin typeface="Calibri" pitchFamily="34" charset="0"/>
+                <a:ea typeface="Calibri" pitchFamily="34" charset="-122"/>
+                <a:cs typeface="Calibri" pitchFamily="34" charset="-120"/>
+              </a:rPr>
+              <a:t>[4]  </a:t>
+            </a:r>
+            <a:pPr indent="0" marL="0">
+              <a:lnSpc>
+                <a:spcPct val="105000"/>
+              </a:lnSpc>
+              <a:spcAft>
+                <a:spcPts val="300"/>
+              </a:spcAft>
+              <a:buNone/>
+            </a:pPr>
+            <a:r>
+              <a:rPr lang="en-US" sz="950" dirty="0">
+                <a:solidFill>
+                  <a:srgbClr val="1B2A41"/>
+                </a:solidFill>
+                <a:latin typeface="Calibri" pitchFamily="34" charset="0"/>
+                <a:ea typeface="Calibri" pitchFamily="34" charset="-122"/>
+                <a:cs typeface="Calibri" pitchFamily="34" charset="-120"/>
+              </a:rPr>
+              <a:t>Wang, Zou, Lin, Sun, Liu, Zhang, Liu, Aw, Chen. </a:t>
+            </a:r>
+            <a:pPr indent="0" marL="0">
+              <a:lnSpc>
+                <a:spcPct val="105000"/>
+              </a:lnSpc>
+              <a:spcAft>
+                <a:spcPts val="300"/>
+              </a:spcAft>
+              <a:buNone/>
+            </a:pPr>
+            <a:r>
+              <a:rPr lang="en-US" sz="950" dirty="0">
+                <a:solidFill>
+                  <a:srgbClr val="0F1B2D"/>
+                </a:solidFill>
+                <a:latin typeface="Calibri" pitchFamily="34" charset="0"/>
+                <a:ea typeface="Calibri" pitchFamily="34" charset="-122"/>
+                <a:cs typeface="Calibri" pitchFamily="34" charset="-120"/>
+              </a:rPr>
+              <a:t>AudioBench: A universal benchmark for audio large language models. </a:t>
+            </a:r>
+            <a:pPr indent="0" marL="0">
+              <a:lnSpc>
+                <a:spcPct val="105000"/>
+              </a:lnSpc>
+              <a:spcAft>
+                <a:spcPts val="300"/>
+              </a:spcAft>
+              <a:buNone/>
+            </a:pPr>
+            <a:r>
+              <a:rPr lang="en-US" sz="950" i="1" dirty="0">
+                <a:solidFill>
+                  <a:srgbClr val="5B6B7F"/>
+                </a:solidFill>
+                <a:latin typeface="Calibri" pitchFamily="34" charset="0"/>
+                <a:ea typeface="Calibri" pitchFamily="34" charset="-122"/>
+                <a:cs typeface="Calibri" pitchFamily="34" charset="-120"/>
+              </a:rPr>
+              <a:t>NAACL 2025</a:t>
+            </a:r>
+            <a:endParaRPr lang="en-US" sz="950" dirty="0"/>
+          </a:p>
+          <a:p>
+            <a:pPr indent="0" marL="0">
+              <a:lnSpc>
+                <a:spcPct val="105000"/>
+              </a:lnSpc>
+              <a:spcAft>
+                <a:spcPts val="300"/>
+              </a:spcAft>
+              <a:buNone/>
+            </a:pPr>
+            <a:r>
+              <a:rPr lang="en-US" sz="950" b="1" dirty="0">
+                <a:solidFill>
+                  <a:srgbClr val="0B7F8A"/>
+                </a:solidFill>
+                <a:latin typeface="Calibri" pitchFamily="34" charset="0"/>
+                <a:ea typeface="Calibri" pitchFamily="34" charset="-122"/>
+                <a:cs typeface="Calibri" pitchFamily="34" charset="-120"/>
+              </a:rPr>
+              <a:t>[5]  </a:t>
+            </a:r>
+            <a:pPr indent="0" marL="0">
+              <a:lnSpc>
+                <a:spcPct val="105000"/>
+              </a:lnSpc>
+              <a:spcAft>
+                <a:spcPts val="300"/>
+              </a:spcAft>
+              <a:buNone/>
+            </a:pPr>
+            <a:r>
+              <a:rPr lang="en-US" sz="950" dirty="0">
+                <a:solidFill>
+                  <a:srgbClr val="1B2A41"/>
+                </a:solidFill>
+                <a:latin typeface="Calibri" pitchFamily="34" charset="0"/>
+                <a:ea typeface="Calibri" pitchFamily="34" charset="-122"/>
+                <a:cs typeface="Calibri" pitchFamily="34" charset="-120"/>
+              </a:rPr>
+              <a:t>Jain, Shukla, Rajeev, Kulkarni, Khatri, Agarwal. </a:t>
+            </a:r>
+            <a:pPr indent="0" marL="0">
+              <a:lnSpc>
+                <a:spcPct val="105000"/>
+              </a:lnSpc>
+              <a:spcAft>
+                <a:spcPts val="300"/>
+              </a:spcAft>
+              <a:buNone/>
+            </a:pPr>
+            <a:r>
+              <a:rPr lang="en-US" sz="950" dirty="0">
+                <a:solidFill>
+                  <a:srgbClr val="0F1B2D"/>
+                </a:solidFill>
+                <a:latin typeface="Calibri" pitchFamily="34" charset="0"/>
+                <a:ea typeface="Calibri" pitchFamily="34" charset="-122"/>
+                <a:cs typeface="Calibri" pitchFamily="34" charset="-120"/>
+              </a:rPr>
+              <a:t>VoiceAgentBench: Are voice assistants ready for agentic tasks? </a:t>
+            </a:r>
+            <a:pPr indent="0" marL="0">
+              <a:lnSpc>
+                <a:spcPct val="105000"/>
+              </a:lnSpc>
+              <a:spcAft>
+                <a:spcPts val="300"/>
+              </a:spcAft>
+              <a:buNone/>
+            </a:pPr>
+            <a:r>
+              <a:rPr lang="en-US" sz="950" i="1" dirty="0">
+                <a:solidFill>
+                  <a:srgbClr val="5B6B7F"/>
+                </a:solidFill>
+                <a:latin typeface="Calibri" pitchFamily="34" charset="0"/>
+                <a:ea typeface="Calibri" pitchFamily="34" charset="-122"/>
+                <a:cs typeface="Calibri" pitchFamily="34" charset="-120"/>
+              </a:rPr>
+              <a:t>arXiv:2510.07978, 2025</a:t>
+            </a:r>
+            <a:endParaRPr lang="en-US" sz="950" dirty="0"/>
+          </a:p>
+          <a:p>
+            <a:pPr indent="0" marL="0">
+              <a:lnSpc>
+                <a:spcPct val="105000"/>
+              </a:lnSpc>
+              <a:spcAft>
+                <a:spcPts val="300"/>
+              </a:spcAft>
+              <a:buNone/>
+            </a:pPr>
+            <a:r>
+              <a:rPr lang="en-US" sz="950" b="1" dirty="0">
+                <a:solidFill>
+                  <a:srgbClr val="0B7F8A"/>
+                </a:solidFill>
+                <a:latin typeface="Calibri" pitchFamily="34" charset="0"/>
+                <a:ea typeface="Calibri" pitchFamily="34" charset="-122"/>
+                <a:cs typeface="Calibri" pitchFamily="34" charset="-120"/>
+              </a:rPr>
+              <a:t>[6]  </a:t>
+            </a:r>
+            <a:pPr indent="0" marL="0">
+              <a:lnSpc>
+                <a:spcPct val="105000"/>
+              </a:lnSpc>
+              <a:spcAft>
+                <a:spcPts val="300"/>
+              </a:spcAft>
+              <a:buNone/>
+            </a:pPr>
+            <a:r>
+              <a:rPr lang="en-US" sz="950" dirty="0">
+                <a:solidFill>
+                  <a:srgbClr val="1B2A41"/>
+                </a:solidFill>
+                <a:latin typeface="Calibri" pitchFamily="34" charset="0"/>
+                <a:ea typeface="Calibri" pitchFamily="34" charset="-122"/>
+                <a:cs typeface="Calibri" pitchFamily="34" charset="-120"/>
+              </a:rPr>
+              <a:t>Hemphill, Godfrey, Doddington. </a:t>
+            </a:r>
+            <a:pPr indent="0" marL="0">
+              <a:lnSpc>
+                <a:spcPct val="105000"/>
+              </a:lnSpc>
+              <a:spcAft>
+                <a:spcPts val="300"/>
+              </a:spcAft>
+              <a:buNone/>
+            </a:pPr>
+            <a:r>
+              <a:rPr lang="en-US" sz="950" dirty="0">
+                <a:solidFill>
+                  <a:srgbClr val="0F1B2D"/>
+                </a:solidFill>
+                <a:latin typeface="Calibri" pitchFamily="34" charset="0"/>
+                <a:ea typeface="Calibri" pitchFamily="34" charset="-122"/>
+                <a:cs typeface="Calibri" pitchFamily="34" charset="-120"/>
+              </a:rPr>
+              <a:t>The ATIS spoken language systems pilot corpus. </a:t>
+            </a:r>
+            <a:pPr indent="0" marL="0">
+              <a:lnSpc>
+                <a:spcPct val="105000"/>
+              </a:lnSpc>
+              <a:spcAft>
+                <a:spcPts val="300"/>
+              </a:spcAft>
+              <a:buNone/>
+            </a:pPr>
+            <a:r>
+              <a:rPr lang="en-US" sz="950" i="1" dirty="0">
+                <a:solidFill>
+                  <a:srgbClr val="5B6B7F"/>
+                </a:solidFill>
+                <a:latin typeface="Calibri" pitchFamily="34" charset="0"/>
+                <a:ea typeface="Calibri" pitchFamily="34" charset="-122"/>
+                <a:cs typeface="Calibri" pitchFamily="34" charset="-120"/>
+              </a:rPr>
+              <a:t>Workshop on Speech and Natural Language, 1990</a:t>
+            </a:r>
+            <a:endParaRPr lang="en-US" sz="950" dirty="0"/>
+          </a:p>
+          <a:p>
+            <a:pPr indent="0" marL="0">
+              <a:lnSpc>
+                <a:spcPct val="105000"/>
+              </a:lnSpc>
+              <a:spcAft>
+                <a:spcPts val="300"/>
+              </a:spcAft>
+              <a:buNone/>
+            </a:pPr>
+            <a:r>
+              <a:rPr lang="en-US" sz="950" b="1" dirty="0">
+                <a:solidFill>
+                  <a:srgbClr val="0B7F8A"/>
+                </a:solidFill>
+                <a:latin typeface="Calibri" pitchFamily="34" charset="0"/>
+                <a:ea typeface="Calibri" pitchFamily="34" charset="-122"/>
+                <a:cs typeface="Calibri" pitchFamily="34" charset="-120"/>
+              </a:rPr>
+              <a:t>[7]  </a:t>
+            </a:r>
+            <a:pPr indent="0" marL="0">
+              <a:lnSpc>
+                <a:spcPct val="105000"/>
+              </a:lnSpc>
+              <a:spcAft>
+                <a:spcPts val="300"/>
+              </a:spcAft>
+              <a:buNone/>
+            </a:pPr>
+            <a:r>
+              <a:rPr lang="en-US" sz="950" dirty="0">
+                <a:solidFill>
+                  <a:srgbClr val="1B2A41"/>
+                </a:solidFill>
+                <a:latin typeface="Calibri" pitchFamily="34" charset="0"/>
+                <a:ea typeface="Calibri" pitchFamily="34" charset="-122"/>
+                <a:cs typeface="Calibri" pitchFamily="34" charset="-120"/>
+              </a:rPr>
+              <a:t>Bastianelli et al. </a:t>
+            </a:r>
+            <a:pPr indent="0" marL="0">
+              <a:lnSpc>
+                <a:spcPct val="105000"/>
+              </a:lnSpc>
+              <a:spcAft>
+                <a:spcPts val="300"/>
+              </a:spcAft>
+              <a:buNone/>
+            </a:pPr>
+            <a:r>
+              <a:rPr lang="en-US" sz="950" dirty="0">
+                <a:solidFill>
+                  <a:srgbClr val="0F1B2D"/>
+                </a:solidFill>
+                <a:latin typeface="Calibri" pitchFamily="34" charset="0"/>
+                <a:ea typeface="Calibri" pitchFamily="34" charset="-122"/>
+                <a:cs typeface="Calibri" pitchFamily="34" charset="-120"/>
+              </a:rPr>
+              <a:t>SLURP: A spoken language understanding resource package. </a:t>
+            </a:r>
+            <a:pPr indent="0" marL="0">
+              <a:lnSpc>
+                <a:spcPct val="105000"/>
+              </a:lnSpc>
+              <a:spcAft>
+                <a:spcPts val="300"/>
+              </a:spcAft>
+              <a:buNone/>
+            </a:pPr>
+            <a:r>
+              <a:rPr lang="en-US" sz="950" i="1" dirty="0">
+                <a:solidFill>
+                  <a:srgbClr val="5B6B7F"/>
+                </a:solidFill>
+                <a:latin typeface="Calibri" pitchFamily="34" charset="0"/>
+                <a:ea typeface="Calibri" pitchFamily="34" charset="-122"/>
+                <a:cs typeface="Calibri" pitchFamily="34" charset="-120"/>
+              </a:rPr>
+              <a:t>EMNLP 2020</a:t>
+            </a:r>
+            <a:endParaRPr lang="en-US" sz="950" dirty="0"/>
+          </a:p>
+          <a:p>
+            <a:pPr indent="0" marL="0">
+              <a:lnSpc>
+                <a:spcPct val="105000"/>
+              </a:lnSpc>
+              <a:spcAft>
+                <a:spcPts val="300"/>
+              </a:spcAft>
+              <a:buNone/>
+            </a:pPr>
+            <a:r>
+              <a:rPr lang="en-US" sz="950" b="1" dirty="0">
+                <a:solidFill>
+                  <a:srgbClr val="0B7F8A"/>
+                </a:solidFill>
+                <a:latin typeface="Calibri" pitchFamily="34" charset="0"/>
+                <a:ea typeface="Calibri" pitchFamily="34" charset="-122"/>
+                <a:cs typeface="Calibri" pitchFamily="34" charset="-120"/>
+              </a:rPr>
+              <a:t>[8]  </a:t>
+            </a:r>
+            <a:pPr indent="0" marL="0">
+              <a:lnSpc>
+                <a:spcPct val="105000"/>
+              </a:lnSpc>
+              <a:spcAft>
+                <a:spcPts val="300"/>
+              </a:spcAft>
+              <a:buNone/>
+            </a:pPr>
+            <a:r>
+              <a:rPr lang="en-US" sz="950" dirty="0">
+                <a:solidFill>
+                  <a:srgbClr val="1B2A41"/>
+                </a:solidFill>
+                <a:latin typeface="Calibri" pitchFamily="34" charset="0"/>
+                <a:ea typeface="Calibri" pitchFamily="34" charset="-122"/>
+                <a:cs typeface="Calibri" pitchFamily="34" charset="-120"/>
+              </a:rPr>
+              <a:t>Tomasello, Shrivastava, Lazar, et al. </a:t>
+            </a:r>
+            <a:pPr indent="0" marL="0">
+              <a:lnSpc>
+                <a:spcPct val="105000"/>
+              </a:lnSpc>
+              <a:spcAft>
+                <a:spcPts val="300"/>
+              </a:spcAft>
+              <a:buNone/>
+            </a:pPr>
+            <a:r>
+              <a:rPr lang="en-US" sz="950" dirty="0">
+                <a:solidFill>
+                  <a:srgbClr val="0F1B2D"/>
+                </a:solidFill>
+                <a:latin typeface="Calibri" pitchFamily="34" charset="0"/>
+                <a:ea typeface="Calibri" pitchFamily="34" charset="-122"/>
+                <a:cs typeface="Calibri" pitchFamily="34" charset="-120"/>
+              </a:rPr>
+              <a:t>STOP: A dataset for spoken task oriented semantic parsing. </a:t>
+            </a:r>
+            <a:pPr indent="0" marL="0">
+              <a:lnSpc>
+                <a:spcPct val="105000"/>
+              </a:lnSpc>
+              <a:spcAft>
+                <a:spcPts val="300"/>
+              </a:spcAft>
+              <a:buNone/>
+            </a:pPr>
+            <a:r>
+              <a:rPr lang="en-US" sz="950" i="1" dirty="0">
+                <a:solidFill>
+                  <a:srgbClr val="5B6B7F"/>
+                </a:solidFill>
+                <a:latin typeface="Calibri" pitchFamily="34" charset="0"/>
+                <a:ea typeface="Calibri" pitchFamily="34" charset="-122"/>
+                <a:cs typeface="Calibri" pitchFamily="34" charset="-120"/>
+              </a:rPr>
+              <a:t>arXiv:2207.10643, 2022</a:t>
+            </a:r>
+            <a:endParaRPr lang="en-US" sz="950" dirty="0"/>
+          </a:p>
+          <a:p>
+            <a:pPr indent="0" marL="0">
+              <a:lnSpc>
+                <a:spcPct val="105000"/>
+              </a:lnSpc>
+              <a:spcAft>
+                <a:spcPts val="300"/>
+              </a:spcAft>
+              <a:buNone/>
+            </a:pPr>
+            <a:r>
+              <a:rPr lang="en-US" sz="950" b="1" dirty="0">
+                <a:solidFill>
+                  <a:srgbClr val="0B7F8A"/>
+                </a:solidFill>
+                <a:latin typeface="Calibri" pitchFamily="34" charset="0"/>
+                <a:ea typeface="Calibri" pitchFamily="34" charset="-122"/>
+                <a:cs typeface="Calibri" pitchFamily="34" charset="-120"/>
+              </a:rPr>
+              <a:t>[9]  </a:t>
+            </a:r>
+            <a:pPr indent="0" marL="0">
+              <a:lnSpc>
+                <a:spcPct val="105000"/>
+              </a:lnSpc>
+              <a:spcAft>
+                <a:spcPts val="300"/>
+              </a:spcAft>
+              <a:buNone/>
+            </a:pPr>
+            <a:r>
+              <a:rPr lang="en-US" sz="950" dirty="0">
+                <a:solidFill>
+                  <a:srgbClr val="1B2A41"/>
+                </a:solidFill>
+                <a:latin typeface="Calibri" pitchFamily="34" charset="0"/>
+                <a:ea typeface="Calibri" pitchFamily="34" charset="-122"/>
+                <a:cs typeface="Calibri" pitchFamily="34" charset="-120"/>
+              </a:rPr>
+              <a:t>Peng, Cai, Liu, et al. </a:t>
+            </a:r>
+            <a:pPr indent="0" marL="0">
+              <a:lnSpc>
+                <a:spcPct val="105000"/>
+              </a:lnSpc>
+              <a:spcAft>
+                <a:spcPts val="300"/>
+              </a:spcAft>
+              <a:buNone/>
+            </a:pPr>
+            <a:r>
+              <a:rPr lang="en-US" sz="950" dirty="0">
+                <a:solidFill>
+                  <a:srgbClr val="0F1B2D"/>
+                </a:solidFill>
+                <a:latin typeface="Calibri" pitchFamily="34" charset="0"/>
+                <a:ea typeface="Calibri" pitchFamily="34" charset="-122"/>
+                <a:cs typeface="Calibri" pitchFamily="34" charset="-120"/>
+              </a:rPr>
+              <a:t>MAC-SLU: Multi-intent automotive cabin spoken language understanding benchmark. </a:t>
+            </a:r>
+            <a:pPr indent="0" marL="0">
+              <a:lnSpc>
+                <a:spcPct val="105000"/>
+              </a:lnSpc>
+              <a:spcAft>
+                <a:spcPts val="300"/>
+              </a:spcAft>
+              <a:buNone/>
+            </a:pPr>
+            <a:r>
+              <a:rPr lang="en-US" sz="950" i="1" dirty="0">
+                <a:solidFill>
+                  <a:srgbClr val="5B6B7F"/>
+                </a:solidFill>
+                <a:latin typeface="Calibri" pitchFamily="34" charset="0"/>
+                <a:ea typeface="Calibri" pitchFamily="34" charset="-122"/>
+                <a:cs typeface="Calibri" pitchFamily="34" charset="-120"/>
+              </a:rPr>
+              <a:t>arXiv:2512.01603, 2025</a:t>
+            </a:r>
+            <a:endParaRPr lang="en-US" sz="950" dirty="0"/>
+          </a:p>
+          <a:p>
+            <a:pPr indent="0" marL="0">
+              <a:lnSpc>
+                <a:spcPct val="105000"/>
+              </a:lnSpc>
+              <a:spcAft>
+                <a:spcPts val="300"/>
+              </a:spcAft>
+              <a:buNone/>
+            </a:pPr>
+            <a:r>
+              <a:rPr lang="en-US" sz="950" b="1" dirty="0">
+                <a:solidFill>
+                  <a:srgbClr val="0B7F8A"/>
+                </a:solidFill>
+                <a:latin typeface="Calibri" pitchFamily="34" charset="0"/>
+                <a:ea typeface="Calibri" pitchFamily="34" charset="-122"/>
+                <a:cs typeface="Calibri" pitchFamily="34" charset="-120"/>
+              </a:rPr>
+              <a:t>[10]  </a:t>
+            </a:r>
+            <a:pPr indent="0" marL="0">
+              <a:lnSpc>
+                <a:spcPct val="105000"/>
+              </a:lnSpc>
+              <a:spcAft>
+                <a:spcPts val="300"/>
+              </a:spcAft>
+              <a:buNone/>
+            </a:pPr>
+            <a:r>
+              <a:rPr lang="en-US" sz="950" dirty="0">
+                <a:solidFill>
+                  <a:srgbClr val="1B2A41"/>
+                </a:solidFill>
+                <a:latin typeface="Calibri" pitchFamily="34" charset="0"/>
+                <a:ea typeface="Calibri" pitchFamily="34" charset="-122"/>
+                <a:cs typeface="Calibri" pitchFamily="34" charset="-120"/>
+              </a:rPr>
+              <a:t>Mao, Ginart, Emmons. </a:t>
+            </a:r>
+            <a:pPr indent="0" marL="0">
+              <a:lnSpc>
+                <a:spcPct val="105000"/>
+              </a:lnSpc>
+              <a:spcAft>
+                <a:spcPts val="300"/>
+              </a:spcAft>
+              <a:buNone/>
+            </a:pPr>
+            <a:r>
+              <a:rPr lang="en-US" sz="950" dirty="0">
+                <a:solidFill>
+                  <a:srgbClr val="0F1B2D"/>
+                </a:solidFill>
+                <a:latin typeface="Calibri" pitchFamily="34" charset="0"/>
+                <a:ea typeface="Calibri" pitchFamily="34" charset="-122"/>
+                <a:cs typeface="Calibri" pitchFamily="34" charset="-120"/>
+              </a:rPr>
+              <a:t>BFCL Audio: A benchmark for audio-native function calling. </a:t>
+            </a:r>
+            <a:pPr indent="0" marL="0">
+              <a:lnSpc>
+                <a:spcPct val="105000"/>
+              </a:lnSpc>
+              <a:spcAft>
+                <a:spcPts val="300"/>
+              </a:spcAft>
+              <a:buNone/>
+            </a:pPr>
+            <a:r>
+              <a:rPr lang="en-US" sz="950" i="1" dirty="0">
+                <a:solidFill>
+                  <a:srgbClr val="5B6B7F"/>
+                </a:solidFill>
+                <a:latin typeface="Calibri" pitchFamily="34" charset="0"/>
+                <a:ea typeface="Calibri" pitchFamily="34" charset="-122"/>
+                <a:cs typeface="Calibri" pitchFamily="34" charset="-120"/>
+              </a:rPr>
+              <a:t>Salesforce AI Research blog, 2025</a:t>
+            </a:r>
+            <a:endParaRPr lang="en-US" sz="950" dirty="0"/>
+          </a:p>
+          <a:p>
+            <a:pPr indent="0" marL="0">
+              <a:lnSpc>
+                <a:spcPct val="105000"/>
+              </a:lnSpc>
+              <a:spcAft>
+                <a:spcPts val="300"/>
+              </a:spcAft>
+              <a:buNone/>
+            </a:pPr>
+            <a:r>
+              <a:rPr lang="en-US" sz="950" b="1" dirty="0">
+                <a:solidFill>
+                  <a:srgbClr val="0B7F8A"/>
+                </a:solidFill>
+                <a:latin typeface="Calibri" pitchFamily="34" charset="0"/>
+                <a:ea typeface="Calibri" pitchFamily="34" charset="-122"/>
+                <a:cs typeface="Calibri" pitchFamily="34" charset="-120"/>
+              </a:rPr>
+              <a:t>[11]  </a:t>
+            </a:r>
+            <a:pPr indent="0" marL="0">
+              <a:lnSpc>
+                <a:spcPct val="105000"/>
+              </a:lnSpc>
+              <a:spcAft>
+                <a:spcPts val="300"/>
+              </a:spcAft>
+              <a:buNone/>
+            </a:pPr>
+            <a:r>
+              <a:rPr lang="en-US" sz="950" dirty="0">
+                <a:solidFill>
+                  <a:srgbClr val="1B2A41"/>
+                </a:solidFill>
+                <a:latin typeface="Calibri" pitchFamily="34" charset="0"/>
+                <a:ea typeface="Calibri" pitchFamily="34" charset="-122"/>
+                <a:cs typeface="Calibri" pitchFamily="34" charset="-120"/>
+              </a:rPr>
+              <a:t>Mao, Patil, Gonzalez. </a:t>
+            </a:r>
+            <a:pPr indent="0" marL="0">
+              <a:lnSpc>
+                <a:spcPct val="105000"/>
+              </a:lnSpc>
+              <a:spcAft>
+                <a:spcPts val="300"/>
+              </a:spcAft>
+              <a:buNone/>
+            </a:pPr>
+            <a:r>
+              <a:rPr lang="en-US" sz="950" dirty="0">
+                <a:solidFill>
+                  <a:srgbClr val="0F1B2D"/>
+                </a:solidFill>
+                <a:latin typeface="Calibri" pitchFamily="34" charset="0"/>
+                <a:ea typeface="Calibri" pitchFamily="34" charset="-122"/>
+                <a:cs typeface="Calibri" pitchFamily="34" charset="-120"/>
+              </a:rPr>
+              <a:t>MFCL: A multi-modal function calling evaluation for large language models. </a:t>
+            </a:r>
+            <a:pPr indent="0" marL="0">
+              <a:lnSpc>
+                <a:spcPct val="105000"/>
+              </a:lnSpc>
+              <a:spcAft>
+                <a:spcPts val="300"/>
+              </a:spcAft>
+              <a:buNone/>
+            </a:pPr>
+            <a:r>
+              <a:rPr lang="en-US" sz="950" i="1" dirty="0">
+                <a:solidFill>
+                  <a:srgbClr val="5B6B7F"/>
+                </a:solidFill>
+                <a:latin typeface="Calibri" pitchFamily="34" charset="0"/>
+                <a:ea typeface="Calibri" pitchFamily="34" charset="-122"/>
+                <a:cs typeface="Calibri" pitchFamily="34" charset="-120"/>
+              </a:rPr>
+              <a:t>OpenReview, 2025</a:t>
+            </a:r>
+            <a:endParaRPr lang="en-US" sz="950" dirty="0"/>
+          </a:p>
+          <a:p>
+            <a:pPr indent="0" marL="0">
+              <a:lnSpc>
+                <a:spcPct val="105000"/>
+              </a:lnSpc>
+              <a:spcAft>
+                <a:spcPts val="300"/>
+              </a:spcAft>
+              <a:buNone/>
+            </a:pPr>
+            <a:r>
+              <a:rPr lang="en-US" sz="950" b="1" dirty="0">
+                <a:solidFill>
+                  <a:srgbClr val="0B7F8A"/>
+                </a:solidFill>
+                <a:latin typeface="Calibri" pitchFamily="34" charset="0"/>
+                <a:ea typeface="Calibri" pitchFamily="34" charset="-122"/>
+                <a:cs typeface="Calibri" pitchFamily="34" charset="-120"/>
+              </a:rPr>
+              <a:t>[12]  </a:t>
+            </a:r>
+            <a:pPr indent="0" marL="0">
+              <a:lnSpc>
+                <a:spcPct val="105000"/>
+              </a:lnSpc>
+              <a:spcAft>
+                <a:spcPts val="300"/>
+              </a:spcAft>
+              <a:buNone/>
+            </a:pPr>
+            <a:r>
+              <a:rPr lang="en-US" sz="950" dirty="0">
+                <a:solidFill>
+                  <a:srgbClr val="1B2A41"/>
+                </a:solidFill>
+                <a:latin typeface="Calibri" pitchFamily="34" charset="0"/>
+                <a:ea typeface="Calibri" pitchFamily="34" charset="-122"/>
+                <a:cs typeface="Calibri" pitchFamily="34" charset="-120"/>
+              </a:rPr>
+              <a:t>Coucke, Saade, Ball, et al. </a:t>
+            </a:r>
+            <a:pPr indent="0" marL="0">
+              <a:lnSpc>
+                <a:spcPct val="105000"/>
+              </a:lnSpc>
+              <a:spcAft>
+                <a:spcPts val="300"/>
+              </a:spcAft>
+              <a:buNone/>
+            </a:pPr>
+            <a:r>
+              <a:rPr lang="en-US" sz="950" dirty="0">
+                <a:solidFill>
+                  <a:srgbClr val="0F1B2D"/>
+                </a:solidFill>
+                <a:latin typeface="Calibri" pitchFamily="34" charset="0"/>
+                <a:ea typeface="Calibri" pitchFamily="34" charset="-122"/>
+                <a:cs typeface="Calibri" pitchFamily="34" charset="-120"/>
+              </a:rPr>
+              <a:t>Snips voice platform: An embedded SLU system for private-by-design voice interfaces. </a:t>
+            </a:r>
+            <a:pPr indent="0" marL="0">
+              <a:lnSpc>
+                <a:spcPct val="105000"/>
+              </a:lnSpc>
+              <a:spcAft>
+                <a:spcPts val="300"/>
+              </a:spcAft>
+              <a:buNone/>
+            </a:pPr>
+            <a:r>
+              <a:rPr lang="en-US" sz="950" i="1" dirty="0">
+                <a:solidFill>
+                  <a:srgbClr val="5B6B7F"/>
+                </a:solidFill>
+                <a:latin typeface="Calibri" pitchFamily="34" charset="0"/>
+                <a:ea typeface="Calibri" pitchFamily="34" charset="-122"/>
+                <a:cs typeface="Calibri" pitchFamily="34" charset="-120"/>
+              </a:rPr>
+              <a:t>EMNLP 2018</a:t>
+            </a:r>
+            <a:endParaRPr lang="en-US" sz="950" dirty="0"/>
+          </a:p>
+          <a:p>
+            <a:pPr indent="0" marL="0">
+              <a:lnSpc>
+                <a:spcPct val="105000"/>
+              </a:lnSpc>
+              <a:spcAft>
+                <a:spcPts val="300"/>
+              </a:spcAft>
+              <a:buNone/>
+            </a:pPr>
+            <a:r>
+              <a:rPr lang="en-US" sz="950" b="1" dirty="0">
+                <a:solidFill>
+                  <a:srgbClr val="0B7F8A"/>
+                </a:solidFill>
+                <a:latin typeface="Calibri" pitchFamily="34" charset="0"/>
+                <a:ea typeface="Calibri" pitchFamily="34" charset="-122"/>
+                <a:cs typeface="Calibri" pitchFamily="34" charset="-120"/>
+              </a:rPr>
+              <a:t>[13]  </a:t>
+            </a:r>
+            <a:pPr indent="0" marL="0">
+              <a:lnSpc>
+                <a:spcPct val="105000"/>
+              </a:lnSpc>
+              <a:spcAft>
+                <a:spcPts val="300"/>
+              </a:spcAft>
+              <a:buNone/>
+            </a:pPr>
+            <a:r>
+              <a:rPr lang="en-US" sz="950" dirty="0">
+                <a:solidFill>
+                  <a:srgbClr val="1B2A41"/>
+                </a:solidFill>
+                <a:latin typeface="Calibri" pitchFamily="34" charset="0"/>
+                <a:ea typeface="Calibri" pitchFamily="34" charset="-122"/>
+                <a:cs typeface="Calibri" pitchFamily="34" charset="-120"/>
+              </a:rPr>
+              <a:t>Nguyen, Hoang, Tu, Ngo. </a:t>
+            </a:r>
+            <a:pPr indent="0" marL="0">
+              <a:lnSpc>
+                <a:spcPct val="105000"/>
+              </a:lnSpc>
+              <a:spcAft>
+                <a:spcPts val="300"/>
+              </a:spcAft>
+              <a:buNone/>
+            </a:pPr>
+            <a:r>
+              <a:rPr lang="en-US" sz="950" dirty="0">
+                <a:solidFill>
+                  <a:srgbClr val="0F1B2D"/>
+                </a:solidFill>
+                <a:latin typeface="Calibri" pitchFamily="34" charset="0"/>
+                <a:ea typeface="Calibri" pitchFamily="34" charset="-122"/>
+                <a:cs typeface="Calibri" pitchFamily="34" charset="-120"/>
+              </a:rPr>
+              <a:t>Joint multiple intent detection and slot filling with supervised contrastive learning and self-distillation. </a:t>
+            </a:r>
+            <a:pPr indent="0" marL="0">
+              <a:lnSpc>
+                <a:spcPct val="105000"/>
+              </a:lnSpc>
+              <a:spcAft>
+                <a:spcPts val="300"/>
+              </a:spcAft>
+              <a:buNone/>
+            </a:pPr>
+            <a:r>
+              <a:rPr lang="en-US" sz="950" i="1" dirty="0">
+                <a:solidFill>
+                  <a:srgbClr val="5B6B7F"/>
+                </a:solidFill>
+                <a:latin typeface="Calibri" pitchFamily="34" charset="0"/>
+                <a:ea typeface="Calibri" pitchFamily="34" charset="-122"/>
+                <a:cs typeface="Calibri" pitchFamily="34" charset="-120"/>
+              </a:rPr>
+              <a:t>arXiv:2308.14654, 2023</a:t>
+            </a:r>
+            <a:endParaRPr lang="en-US" sz="950" dirty="0"/>
+          </a:p>
+          <a:p>
+            <a:pPr indent="0" marL="0">
+              <a:lnSpc>
+                <a:spcPct val="105000"/>
+              </a:lnSpc>
+              <a:spcAft>
+                <a:spcPts val="300"/>
+              </a:spcAft>
+              <a:buNone/>
+            </a:pPr>
+            <a:r>
+              <a:rPr lang="en-US" sz="950" b="1" dirty="0">
+                <a:solidFill>
+                  <a:srgbClr val="0B7F8A"/>
+                </a:solidFill>
+                <a:latin typeface="Calibri" pitchFamily="34" charset="0"/>
+                <a:ea typeface="Calibri" pitchFamily="34" charset="-122"/>
+                <a:cs typeface="Calibri" pitchFamily="34" charset="-120"/>
+              </a:rPr>
+              <a:t>[14]  </a:t>
+            </a:r>
+            <a:pPr indent="0" marL="0">
+              <a:lnSpc>
+                <a:spcPct val="105000"/>
+              </a:lnSpc>
+              <a:spcAft>
+                <a:spcPts val="300"/>
+              </a:spcAft>
+              <a:buNone/>
+            </a:pPr>
+            <a:r>
+              <a:rPr lang="en-US" sz="950" dirty="0">
+                <a:solidFill>
+                  <a:srgbClr val="1B2A41"/>
+                </a:solidFill>
+                <a:latin typeface="Calibri" pitchFamily="34" charset="0"/>
+                <a:ea typeface="Calibri" pitchFamily="34" charset="-122"/>
+                <a:cs typeface="Calibri" pitchFamily="34" charset="-120"/>
+              </a:rPr>
+              <a:t>Qin, Xu, Che, Liu. </a:t>
+            </a:r>
+            <a:pPr indent="0" marL="0">
+              <a:lnSpc>
+                <a:spcPct val="105000"/>
+              </a:lnSpc>
+              <a:spcAft>
+                <a:spcPts val="300"/>
+              </a:spcAft>
+              <a:buNone/>
+            </a:pPr>
+            <a:r>
+              <a:rPr lang="en-US" sz="950" dirty="0">
+                <a:solidFill>
+                  <a:srgbClr val="0F1B2D"/>
+                </a:solidFill>
+                <a:latin typeface="Calibri" pitchFamily="34" charset="0"/>
+                <a:ea typeface="Calibri" pitchFamily="34" charset="-122"/>
+                <a:cs typeface="Calibri" pitchFamily="34" charset="-120"/>
+              </a:rPr>
+              <a:t>AGIF: An adaptive graph-interactive framework for joint multiple intent detection and slot filling. </a:t>
+            </a:r>
+            <a:pPr indent="0" marL="0">
+              <a:lnSpc>
+                <a:spcPct val="105000"/>
+              </a:lnSpc>
+              <a:spcAft>
+                <a:spcPts val="300"/>
+              </a:spcAft>
+              <a:buNone/>
+            </a:pPr>
+            <a:r>
+              <a:rPr lang="en-US" sz="950" i="1" dirty="0">
+                <a:solidFill>
+                  <a:srgbClr val="5B6B7F"/>
+                </a:solidFill>
+                <a:latin typeface="Calibri" pitchFamily="34" charset="0"/>
+                <a:ea typeface="Calibri" pitchFamily="34" charset="-122"/>
+                <a:cs typeface="Calibri" pitchFamily="34" charset="-120"/>
+              </a:rPr>
+              <a:t>Findings of EMNLP 2020</a:t>
+            </a:r>
+            <a:endParaRPr lang="en-US" sz="950" dirty="0"/>
+          </a:p>
+        </p:txBody>
+      </p:sp>
+      <p:sp>
+        <p:nvSpPr>
+          <p:cNvPr id="15" name="Text 12"/>
+          <p:cNvSpPr txBox="1"/>
+          <p:nvPr/>
+        </p:nvSpPr>
+        <p:spPr>
+          <a:xfrm>
+            <a:off x="6172200" y="1463040"/>
+            <a:ext cx="5468112" cy="4892040"/>
+          </a:xfrm>
+          <a:prstGeom prst="rect">
+            <a:avLst/>
+          </a:prstGeom>
+          <a:noFill/>
+          <a:ln/>
+        </p:spPr>
+        <p:txBody>
+          <a:bodyPr wrap="square" lIns="0" tIns="0" rIns="0" bIns="0" rtlCol="0" anchor="t"/>
+          <a:lstStyle/>
+          <a:p>
+            <a:pPr indent="0" marL="0">
+              <a:lnSpc>
+                <a:spcPct val="105000"/>
+              </a:lnSpc>
+              <a:spcAft>
+                <a:spcPts val="300"/>
+              </a:spcAft>
+              <a:buNone/>
+            </a:pPr>
+            <a:r>
+              <a:rPr lang="en-US" sz="950" b="1" dirty="0">
+                <a:solidFill>
+                  <a:srgbClr val="0B7F8A"/>
+                </a:solidFill>
+                <a:latin typeface="Calibri" pitchFamily="34" charset="0"/>
+                <a:ea typeface="Calibri" pitchFamily="34" charset="-122"/>
+                <a:cs typeface="Calibri" pitchFamily="34" charset="-120"/>
+              </a:rPr>
+              <a:t>[15]  </a:t>
+            </a:r>
+            <a:pPr indent="0" marL="0">
+              <a:lnSpc>
+                <a:spcPct val="105000"/>
+              </a:lnSpc>
+              <a:spcAft>
+                <a:spcPts val="300"/>
+              </a:spcAft>
+              <a:buNone/>
+            </a:pPr>
+            <a:r>
+              <a:rPr lang="en-US" sz="950" dirty="0">
+                <a:solidFill>
+                  <a:srgbClr val="1B2A41"/>
+                </a:solidFill>
+                <a:latin typeface="Calibri" pitchFamily="34" charset="0"/>
+                <a:ea typeface="Calibri" pitchFamily="34" charset="-122"/>
+                <a:cs typeface="Calibri" pitchFamily="34" charset="-120"/>
+              </a:rPr>
+              <a:t>Grossman, Park, Dhawan, et al. </a:t>
+            </a:r>
+            <a:pPr indent="0" marL="0">
+              <a:lnSpc>
+                <a:spcPct val="105000"/>
+              </a:lnSpc>
+              <a:spcAft>
+                <a:spcPts val="300"/>
+              </a:spcAft>
+              <a:buNone/>
+            </a:pPr>
+            <a:r>
+              <a:rPr lang="en-US" sz="950" dirty="0">
+                <a:solidFill>
+                  <a:srgbClr val="0F1B2D"/>
+                </a:solidFill>
+                <a:latin typeface="Calibri" pitchFamily="34" charset="0"/>
+                <a:ea typeface="Calibri" pitchFamily="34" charset="-122"/>
+                <a:cs typeface="Calibri" pitchFamily="34" charset="-120"/>
+              </a:rPr>
+              <a:t>SPGISpeech 2.0: Transcribed multi-speaker financial audio for speaker-tagged transcription. </a:t>
+            </a:r>
+            <a:pPr indent="0" marL="0">
+              <a:lnSpc>
+                <a:spcPct val="105000"/>
+              </a:lnSpc>
+              <a:spcAft>
+                <a:spcPts val="300"/>
+              </a:spcAft>
+              <a:buNone/>
+            </a:pPr>
+            <a:r>
+              <a:rPr lang="en-US" sz="950" i="1" dirty="0">
+                <a:solidFill>
+                  <a:srgbClr val="5B6B7F"/>
+                </a:solidFill>
+                <a:latin typeface="Calibri" pitchFamily="34" charset="0"/>
+                <a:ea typeface="Calibri" pitchFamily="34" charset="-122"/>
+                <a:cs typeface="Calibri" pitchFamily="34" charset="-120"/>
+              </a:rPr>
+              <a:t>arXiv:2508.05554, 2025</a:t>
+            </a:r>
+            <a:endParaRPr lang="en-US" sz="950" dirty="0"/>
+          </a:p>
+          <a:p>
+            <a:pPr indent="0" marL="0">
+              <a:lnSpc>
+                <a:spcPct val="105000"/>
+              </a:lnSpc>
+              <a:spcAft>
+                <a:spcPts val="300"/>
+              </a:spcAft>
+              <a:buNone/>
+            </a:pPr>
+            <a:r>
+              <a:rPr lang="en-US" sz="950" b="1" dirty="0">
+                <a:solidFill>
+                  <a:srgbClr val="0B7F8A"/>
+                </a:solidFill>
+                <a:latin typeface="Calibri" pitchFamily="34" charset="0"/>
+                <a:ea typeface="Calibri" pitchFamily="34" charset="-122"/>
+                <a:cs typeface="Calibri" pitchFamily="34" charset="-120"/>
+              </a:rPr>
+              <a:t>[16]  </a:t>
+            </a:r>
+            <a:pPr indent="0" marL="0">
+              <a:lnSpc>
+                <a:spcPct val="105000"/>
+              </a:lnSpc>
+              <a:spcAft>
+                <a:spcPts val="300"/>
+              </a:spcAft>
+              <a:buNone/>
+            </a:pPr>
+            <a:r>
+              <a:rPr lang="en-US" sz="950" dirty="0">
+                <a:solidFill>
+                  <a:srgbClr val="1B2A41"/>
+                </a:solidFill>
+                <a:latin typeface="Calibri" pitchFamily="34" charset="0"/>
+                <a:ea typeface="Calibri" pitchFamily="34" charset="-122"/>
+                <a:cs typeface="Calibri" pitchFamily="34" charset="-120"/>
+              </a:rPr>
+              <a:t>Shao. </a:t>
+            </a:r>
+            <a:pPr indent="0" marL="0">
+              <a:lnSpc>
+                <a:spcPct val="105000"/>
+              </a:lnSpc>
+              <a:spcAft>
+                <a:spcPts val="300"/>
+              </a:spcAft>
+              <a:buNone/>
+            </a:pPr>
+            <a:r>
+              <a:rPr lang="en-US" sz="950" dirty="0">
+                <a:solidFill>
+                  <a:srgbClr val="0F1B2D"/>
+                </a:solidFill>
+                <a:latin typeface="Calibri" pitchFamily="34" charset="0"/>
+                <a:ea typeface="Calibri" pitchFamily="34" charset="-122"/>
+                <a:cs typeface="Calibri" pitchFamily="34" charset="-120"/>
+              </a:rPr>
+              <a:t>YodasSpeakerPool: A richly-annotated multi-speaker dataset for voice cloning (built from Emilia-YODAS). </a:t>
+            </a:r>
+            <a:pPr indent="0" marL="0">
+              <a:lnSpc>
+                <a:spcPct val="105000"/>
+              </a:lnSpc>
+              <a:spcAft>
+                <a:spcPts val="300"/>
+              </a:spcAft>
+              <a:buNone/>
+            </a:pPr>
+            <a:r>
+              <a:rPr lang="en-US" sz="950" i="1" dirty="0">
+                <a:solidFill>
+                  <a:srgbClr val="5B6B7F"/>
+                </a:solidFill>
+                <a:latin typeface="Calibri" pitchFamily="34" charset="0"/>
+                <a:ea typeface="Calibri" pitchFamily="34" charset="-122"/>
+                <a:cs typeface="Calibri" pitchFamily="34" charset="-120"/>
+              </a:rPr>
+              <a:t>GitHub, 2026</a:t>
+            </a:r>
+            <a:endParaRPr lang="en-US" sz="950" dirty="0"/>
+          </a:p>
+          <a:p>
+            <a:pPr indent="0" marL="0">
+              <a:lnSpc>
+                <a:spcPct val="105000"/>
+              </a:lnSpc>
+              <a:spcAft>
+                <a:spcPts val="300"/>
+              </a:spcAft>
+              <a:buNone/>
+            </a:pPr>
+            <a:r>
+              <a:rPr lang="en-US" sz="950" b="1" dirty="0">
+                <a:solidFill>
+                  <a:srgbClr val="0B7F8A"/>
+                </a:solidFill>
+                <a:latin typeface="Calibri" pitchFamily="34" charset="0"/>
+                <a:ea typeface="Calibri" pitchFamily="34" charset="-122"/>
+                <a:cs typeface="Calibri" pitchFamily="34" charset="-120"/>
+              </a:rPr>
+              <a:t>[17]  </a:t>
+            </a:r>
+            <a:pPr indent="0" marL="0">
+              <a:lnSpc>
+                <a:spcPct val="105000"/>
+              </a:lnSpc>
+              <a:spcAft>
+                <a:spcPts val="300"/>
+              </a:spcAft>
+              <a:buNone/>
+            </a:pPr>
+            <a:r>
+              <a:rPr lang="en-US" sz="950" dirty="0">
+                <a:solidFill>
+                  <a:srgbClr val="1B2A41"/>
+                </a:solidFill>
+                <a:latin typeface="Calibri" pitchFamily="34" charset="0"/>
+                <a:ea typeface="Calibri" pitchFamily="34" charset="-122"/>
+                <a:cs typeface="Calibri" pitchFamily="34" charset="-120"/>
+              </a:rPr>
+              <a:t>Zheng, Cheng, Chen, Wang, Chen. </a:t>
+            </a:r>
+            <a:pPr indent="0" marL="0">
+              <a:lnSpc>
+                <a:spcPct val="105000"/>
+              </a:lnSpc>
+              <a:spcAft>
+                <a:spcPts val="300"/>
+              </a:spcAft>
+              <a:buNone/>
+            </a:pPr>
+            <a:r>
+              <a:rPr lang="en-US" sz="950" dirty="0">
+                <a:solidFill>
+                  <a:srgbClr val="0F1B2D"/>
+                </a:solidFill>
+                <a:latin typeface="Calibri" pitchFamily="34" charset="0"/>
+                <a:ea typeface="Calibri" pitchFamily="34" charset="-122"/>
+                <a:cs typeface="Calibri" pitchFamily="34" charset="-120"/>
+              </a:rPr>
+              <a:t>3D-Speaker: A large-scale multi-device, multi-distance, and multi-dialect corpus. </a:t>
+            </a:r>
+            <a:pPr indent="0" marL="0">
+              <a:lnSpc>
+                <a:spcPct val="105000"/>
+              </a:lnSpc>
+              <a:spcAft>
+                <a:spcPts val="300"/>
+              </a:spcAft>
+              <a:buNone/>
+            </a:pPr>
+            <a:r>
+              <a:rPr lang="en-US" sz="950" i="1" dirty="0">
+                <a:solidFill>
+                  <a:srgbClr val="5B6B7F"/>
+                </a:solidFill>
+                <a:latin typeface="Calibri" pitchFamily="34" charset="0"/>
+                <a:ea typeface="Calibri" pitchFamily="34" charset="-122"/>
+                <a:cs typeface="Calibri" pitchFamily="34" charset="-120"/>
+              </a:rPr>
+              <a:t>arXiv:2306.15354, 2023</a:t>
+            </a:r>
+            <a:endParaRPr lang="en-US" sz="950" dirty="0"/>
+          </a:p>
+          <a:p>
+            <a:pPr indent="0" marL="0">
+              <a:lnSpc>
+                <a:spcPct val="105000"/>
+              </a:lnSpc>
+              <a:spcAft>
+                <a:spcPts val="300"/>
+              </a:spcAft>
+              <a:buNone/>
+            </a:pPr>
+            <a:r>
+              <a:rPr lang="en-US" sz="950" b="1" dirty="0">
+                <a:solidFill>
+                  <a:srgbClr val="0B7F8A"/>
+                </a:solidFill>
+                <a:latin typeface="Calibri" pitchFamily="34" charset="0"/>
+                <a:ea typeface="Calibri" pitchFamily="34" charset="-122"/>
+                <a:cs typeface="Calibri" pitchFamily="34" charset="-120"/>
+              </a:rPr>
+              <a:t>[18]  </a:t>
+            </a:r>
+            <a:pPr indent="0" marL="0">
+              <a:lnSpc>
+                <a:spcPct val="105000"/>
+              </a:lnSpc>
+              <a:spcAft>
+                <a:spcPts val="300"/>
+              </a:spcAft>
+              <a:buNone/>
+            </a:pPr>
+            <a:r>
+              <a:rPr lang="en-US" sz="950" dirty="0">
+                <a:solidFill>
+                  <a:srgbClr val="1B2A41"/>
+                </a:solidFill>
+                <a:latin typeface="Calibri" pitchFamily="34" charset="0"/>
+                <a:ea typeface="Calibri" pitchFamily="34" charset="-122"/>
+                <a:cs typeface="Calibri" pitchFamily="34" charset="-120"/>
+              </a:rPr>
+              <a:t>Wang, Riviere, Lee, et al. </a:t>
+            </a:r>
+            <a:pPr indent="0" marL="0">
+              <a:lnSpc>
+                <a:spcPct val="105000"/>
+              </a:lnSpc>
+              <a:spcAft>
+                <a:spcPts val="300"/>
+              </a:spcAft>
+              <a:buNone/>
+            </a:pPr>
+            <a:r>
+              <a:rPr lang="en-US" sz="950" dirty="0">
+                <a:solidFill>
+                  <a:srgbClr val="0F1B2D"/>
+                </a:solidFill>
+                <a:latin typeface="Calibri" pitchFamily="34" charset="0"/>
+                <a:ea typeface="Calibri" pitchFamily="34" charset="-122"/>
+                <a:cs typeface="Calibri" pitchFamily="34" charset="-120"/>
+              </a:rPr>
+              <a:t>VoxPopuli: A large-scale multilingual speech corpus for representation learning. </a:t>
+            </a:r>
+            <a:pPr indent="0" marL="0">
+              <a:lnSpc>
+                <a:spcPct val="105000"/>
+              </a:lnSpc>
+              <a:spcAft>
+                <a:spcPts val="300"/>
+              </a:spcAft>
+              <a:buNone/>
+            </a:pPr>
+            <a:r>
+              <a:rPr lang="en-US" sz="950" i="1" dirty="0">
+                <a:solidFill>
+                  <a:srgbClr val="5B6B7F"/>
+                </a:solidFill>
+                <a:latin typeface="Calibri" pitchFamily="34" charset="0"/>
+                <a:ea typeface="Calibri" pitchFamily="34" charset="-122"/>
+                <a:cs typeface="Calibri" pitchFamily="34" charset="-120"/>
+              </a:rPr>
+              <a:t>ACL-IJCNLP 2021</a:t>
+            </a:r>
+            <a:endParaRPr lang="en-US" sz="950" dirty="0"/>
+          </a:p>
+          <a:p>
+            <a:pPr indent="0" marL="0">
+              <a:lnSpc>
+                <a:spcPct val="105000"/>
+              </a:lnSpc>
+              <a:spcAft>
+                <a:spcPts val="300"/>
+              </a:spcAft>
+              <a:buNone/>
+            </a:pPr>
+            <a:r>
+              <a:rPr lang="en-US" sz="950" b="1" dirty="0">
+                <a:solidFill>
+                  <a:srgbClr val="0B7F8A"/>
+                </a:solidFill>
+                <a:latin typeface="Calibri" pitchFamily="34" charset="0"/>
+                <a:ea typeface="Calibri" pitchFamily="34" charset="-122"/>
+                <a:cs typeface="Calibri" pitchFamily="34" charset="-120"/>
+              </a:rPr>
+              <a:t>[19]  </a:t>
+            </a:r>
+            <a:pPr indent="0" marL="0">
+              <a:lnSpc>
+                <a:spcPct val="105000"/>
+              </a:lnSpc>
+              <a:spcAft>
+                <a:spcPts val="300"/>
+              </a:spcAft>
+              <a:buNone/>
+            </a:pPr>
+            <a:r>
+              <a:rPr lang="en-US" sz="950" dirty="0">
+                <a:solidFill>
+                  <a:srgbClr val="1B2A41"/>
+                </a:solidFill>
+                <a:latin typeface="Calibri" pitchFamily="34" charset="0"/>
+                <a:ea typeface="Calibri" pitchFamily="34" charset="-122"/>
+                <a:cs typeface="Calibri" pitchFamily="34" charset="-120"/>
+              </a:rPr>
+              <a:t>Hu, Zhu, He, et al. </a:t>
+            </a:r>
+            <a:pPr indent="0" marL="0">
+              <a:lnSpc>
+                <a:spcPct val="105000"/>
+              </a:lnSpc>
+              <a:spcAft>
+                <a:spcPts val="300"/>
+              </a:spcAft>
+              <a:buNone/>
+            </a:pPr>
+            <a:r>
+              <a:rPr lang="en-US" sz="950" dirty="0">
+                <a:solidFill>
+                  <a:srgbClr val="0F1B2D"/>
+                </a:solidFill>
+                <a:latin typeface="Calibri" pitchFamily="34" charset="0"/>
+                <a:ea typeface="Calibri" pitchFamily="34" charset="-122"/>
+                <a:cs typeface="Calibri" pitchFamily="34" charset="-120"/>
+              </a:rPr>
+              <a:t>Qwen3-TTS technical report. </a:t>
+            </a:r>
+            <a:pPr indent="0" marL="0">
+              <a:lnSpc>
+                <a:spcPct val="105000"/>
+              </a:lnSpc>
+              <a:spcAft>
+                <a:spcPts val="300"/>
+              </a:spcAft>
+              <a:buNone/>
+            </a:pPr>
+            <a:r>
+              <a:rPr lang="en-US" sz="950" i="1" dirty="0">
+                <a:solidFill>
+                  <a:srgbClr val="5B6B7F"/>
+                </a:solidFill>
+                <a:latin typeface="Calibri" pitchFamily="34" charset="0"/>
+                <a:ea typeface="Calibri" pitchFamily="34" charset="-122"/>
+                <a:cs typeface="Calibri" pitchFamily="34" charset="-120"/>
+              </a:rPr>
+              <a:t>arXiv:2601.15621, 2026</a:t>
+            </a:r>
+            <a:endParaRPr lang="en-US" sz="950" dirty="0"/>
+          </a:p>
+          <a:p>
+            <a:pPr indent="0" marL="0">
+              <a:lnSpc>
+                <a:spcPct val="105000"/>
+              </a:lnSpc>
+              <a:spcAft>
+                <a:spcPts val="300"/>
+              </a:spcAft>
+              <a:buNone/>
+            </a:pPr>
+            <a:r>
+              <a:rPr lang="en-US" sz="950" b="1" dirty="0">
+                <a:solidFill>
+                  <a:srgbClr val="0B7F8A"/>
+                </a:solidFill>
+                <a:latin typeface="Calibri" pitchFamily="34" charset="0"/>
+                <a:ea typeface="Calibri" pitchFamily="34" charset="-122"/>
+                <a:cs typeface="Calibri" pitchFamily="34" charset="-120"/>
+              </a:rPr>
+              <a:t>[20]  </a:t>
+            </a:r>
+            <a:pPr indent="0" marL="0">
+              <a:lnSpc>
+                <a:spcPct val="105000"/>
+              </a:lnSpc>
+              <a:spcAft>
+                <a:spcPts val="300"/>
+              </a:spcAft>
+              <a:buNone/>
+            </a:pPr>
+            <a:r>
+              <a:rPr lang="en-US" sz="950" dirty="0">
+                <a:solidFill>
+                  <a:srgbClr val="1B2A41"/>
+                </a:solidFill>
+                <a:latin typeface="Calibri" pitchFamily="34" charset="0"/>
+                <a:ea typeface="Calibri" pitchFamily="34" charset="-122"/>
+                <a:cs typeface="Calibri" pitchFamily="34" charset="-120"/>
+              </a:rPr>
+              <a:t>Du, Gao, Wang, et al. </a:t>
+            </a:r>
+            <a:pPr indent="0" marL="0">
+              <a:lnSpc>
+                <a:spcPct val="105000"/>
+              </a:lnSpc>
+              <a:spcAft>
+                <a:spcPts val="300"/>
+              </a:spcAft>
+              <a:buNone/>
+            </a:pPr>
+            <a:r>
+              <a:rPr lang="en-US" sz="950" dirty="0">
+                <a:solidFill>
+                  <a:srgbClr val="0F1B2D"/>
+                </a:solidFill>
+                <a:latin typeface="Calibri" pitchFamily="34" charset="0"/>
+                <a:ea typeface="Calibri" pitchFamily="34" charset="-122"/>
+                <a:cs typeface="Calibri" pitchFamily="34" charset="-120"/>
+              </a:rPr>
+              <a:t>CosyVoice 3: Towards in-the-wild speech generation via scaling-up and post-training. </a:t>
+            </a:r>
+            <a:pPr indent="0" marL="0">
+              <a:lnSpc>
+                <a:spcPct val="105000"/>
+              </a:lnSpc>
+              <a:spcAft>
+                <a:spcPts val="300"/>
+              </a:spcAft>
+              <a:buNone/>
+            </a:pPr>
+            <a:r>
+              <a:rPr lang="en-US" sz="950" i="1" dirty="0">
+                <a:solidFill>
+                  <a:srgbClr val="5B6B7F"/>
+                </a:solidFill>
+                <a:latin typeface="Calibri" pitchFamily="34" charset="0"/>
+                <a:ea typeface="Calibri" pitchFamily="34" charset="-122"/>
+                <a:cs typeface="Calibri" pitchFamily="34" charset="-120"/>
+              </a:rPr>
+              <a:t>arXiv:2505.17589, 2025</a:t>
+            </a:r>
+            <a:endParaRPr lang="en-US" sz="950" dirty="0"/>
+          </a:p>
+          <a:p>
+            <a:pPr indent="0" marL="0">
+              <a:lnSpc>
+                <a:spcPct val="105000"/>
+              </a:lnSpc>
+              <a:spcAft>
+                <a:spcPts val="300"/>
+              </a:spcAft>
+              <a:buNone/>
+            </a:pPr>
+            <a:r>
+              <a:rPr lang="en-US" sz="950" b="1" dirty="0">
+                <a:solidFill>
+                  <a:srgbClr val="0B7F8A"/>
+                </a:solidFill>
+                <a:latin typeface="Calibri" pitchFamily="34" charset="0"/>
+                <a:ea typeface="Calibri" pitchFamily="34" charset="-122"/>
+                <a:cs typeface="Calibri" pitchFamily="34" charset="-120"/>
+              </a:rPr>
+              <a:t>[21]  </a:t>
+            </a:r>
+            <a:pPr indent="0" marL="0">
+              <a:lnSpc>
+                <a:spcPct val="105000"/>
+              </a:lnSpc>
+              <a:spcAft>
+                <a:spcPts val="300"/>
+              </a:spcAft>
+              <a:buNone/>
+            </a:pPr>
+            <a:r>
+              <a:rPr lang="en-US" sz="950" dirty="0">
+                <a:solidFill>
+                  <a:srgbClr val="1B2A41"/>
+                </a:solidFill>
+                <a:latin typeface="Calibri" pitchFamily="34" charset="0"/>
+                <a:ea typeface="Calibri" pitchFamily="34" charset="-122"/>
+                <a:cs typeface="Calibri" pitchFamily="34" charset="-120"/>
+              </a:rPr>
+              <a:t>Wu, Yan, Hu, et al. </a:t>
+            </a:r>
+            <a:pPr indent="0" marL="0">
+              <a:lnSpc>
+                <a:spcPct val="105000"/>
+              </a:lnSpc>
+              <a:spcAft>
+                <a:spcPts val="300"/>
+              </a:spcAft>
+              <a:buNone/>
+            </a:pPr>
+            <a:r>
+              <a:rPr lang="en-US" sz="950" dirty="0">
+                <a:solidFill>
+                  <a:srgbClr val="0F1B2D"/>
+                </a:solidFill>
+                <a:latin typeface="Calibri" pitchFamily="34" charset="0"/>
+                <a:ea typeface="Calibri" pitchFamily="34" charset="-122"/>
+                <a:cs typeface="Calibri" pitchFamily="34" charset="-120"/>
+              </a:rPr>
+              <a:t>Step-Audio 2 technical report. </a:t>
+            </a:r>
+            <a:pPr indent="0" marL="0">
+              <a:lnSpc>
+                <a:spcPct val="105000"/>
+              </a:lnSpc>
+              <a:spcAft>
+                <a:spcPts val="300"/>
+              </a:spcAft>
+              <a:buNone/>
+            </a:pPr>
+            <a:r>
+              <a:rPr lang="en-US" sz="950" i="1" dirty="0">
+                <a:solidFill>
+                  <a:srgbClr val="5B6B7F"/>
+                </a:solidFill>
+                <a:latin typeface="Calibri" pitchFamily="34" charset="0"/>
+                <a:ea typeface="Calibri" pitchFamily="34" charset="-122"/>
+                <a:cs typeface="Calibri" pitchFamily="34" charset="-120"/>
+              </a:rPr>
+              <a:t>arXiv:2507.16632, 2025</a:t>
+            </a:r>
+            <a:endParaRPr lang="en-US" sz="950" dirty="0"/>
+          </a:p>
+          <a:p>
+            <a:pPr indent="0" marL="0">
+              <a:lnSpc>
+                <a:spcPct val="105000"/>
+              </a:lnSpc>
+              <a:spcAft>
+                <a:spcPts val="300"/>
+              </a:spcAft>
+              <a:buNone/>
+            </a:pPr>
+            <a:r>
+              <a:rPr lang="en-US" sz="950" b="1" dirty="0">
+                <a:solidFill>
+                  <a:srgbClr val="0B7F8A"/>
+                </a:solidFill>
+                <a:latin typeface="Calibri" pitchFamily="34" charset="0"/>
+                <a:ea typeface="Calibri" pitchFamily="34" charset="-122"/>
+                <a:cs typeface="Calibri" pitchFamily="34" charset="-120"/>
+              </a:rPr>
+              <a:t>[22]  </a:t>
+            </a:r>
+            <a:pPr indent="0" marL="0">
+              <a:lnSpc>
+                <a:spcPct val="105000"/>
+              </a:lnSpc>
+              <a:spcAft>
+                <a:spcPts val="300"/>
+              </a:spcAft>
+              <a:buNone/>
+            </a:pPr>
+            <a:r>
+              <a:rPr lang="en-US" sz="950" dirty="0">
+                <a:solidFill>
+                  <a:srgbClr val="1B2A41"/>
+                </a:solidFill>
+                <a:latin typeface="Calibri" pitchFamily="34" charset="0"/>
+                <a:ea typeface="Calibri" pitchFamily="34" charset="-122"/>
+                <a:cs typeface="Calibri" pitchFamily="34" charset="-120"/>
+              </a:rPr>
+              <a:t>Goel, Ghosh, Kim, et al. </a:t>
+            </a:r>
+            <a:pPr indent="0" marL="0">
+              <a:lnSpc>
+                <a:spcPct val="105000"/>
+              </a:lnSpc>
+              <a:spcAft>
+                <a:spcPts val="300"/>
+              </a:spcAft>
+              <a:buNone/>
+            </a:pPr>
+            <a:r>
+              <a:rPr lang="en-US" sz="950" dirty="0">
+                <a:solidFill>
+                  <a:srgbClr val="0F1B2D"/>
+                </a:solidFill>
+                <a:latin typeface="Calibri" pitchFamily="34" charset="0"/>
+                <a:ea typeface="Calibri" pitchFamily="34" charset="-122"/>
+                <a:cs typeface="Calibri" pitchFamily="34" charset="-120"/>
+              </a:rPr>
+              <a:t>Audio Flamingo 3: Advancing audio intelligence with fully open large audio language models. </a:t>
+            </a:r>
+            <a:pPr indent="0" marL="0">
+              <a:lnSpc>
+                <a:spcPct val="105000"/>
+              </a:lnSpc>
+              <a:spcAft>
+                <a:spcPts val="300"/>
+              </a:spcAft>
+              <a:buNone/>
+            </a:pPr>
+            <a:r>
+              <a:rPr lang="en-US" sz="950" i="1" dirty="0">
+                <a:solidFill>
+                  <a:srgbClr val="5B6B7F"/>
+                </a:solidFill>
+                <a:latin typeface="Calibri" pitchFamily="34" charset="0"/>
+                <a:ea typeface="Calibri" pitchFamily="34" charset="-122"/>
+                <a:cs typeface="Calibri" pitchFamily="34" charset="-120"/>
+              </a:rPr>
+              <a:t>arXiv:2507.08128, 2025</a:t>
+            </a:r>
+            <a:endParaRPr lang="en-US" sz="950" dirty="0"/>
+          </a:p>
+          <a:p>
+            <a:pPr indent="0" marL="0">
+              <a:lnSpc>
+                <a:spcPct val="105000"/>
+              </a:lnSpc>
+              <a:spcAft>
+                <a:spcPts val="300"/>
+              </a:spcAft>
+              <a:buNone/>
+            </a:pPr>
+            <a:r>
+              <a:rPr lang="en-US" sz="950" b="1" dirty="0">
+                <a:solidFill>
+                  <a:srgbClr val="0B7F8A"/>
+                </a:solidFill>
+                <a:latin typeface="Calibri" pitchFamily="34" charset="0"/>
+                <a:ea typeface="Calibri" pitchFamily="34" charset="-122"/>
+                <a:cs typeface="Calibri" pitchFamily="34" charset="-120"/>
+              </a:rPr>
+              <a:t>[23]  </a:t>
+            </a:r>
+            <a:pPr indent="0" marL="0">
+              <a:lnSpc>
+                <a:spcPct val="105000"/>
+              </a:lnSpc>
+              <a:spcAft>
+                <a:spcPts val="300"/>
+              </a:spcAft>
+              <a:buNone/>
+            </a:pPr>
+            <a:r>
+              <a:rPr lang="en-US" sz="950" dirty="0">
+                <a:solidFill>
+                  <a:srgbClr val="1B2A41"/>
+                </a:solidFill>
+                <a:latin typeface="Calibri" pitchFamily="34" charset="0"/>
+                <a:ea typeface="Calibri" pitchFamily="34" charset="-122"/>
+                <a:cs typeface="Calibri" pitchFamily="34" charset="-120"/>
+              </a:rPr>
+              <a:t>Ding, Ju, Leng, et al. </a:t>
+            </a:r>
+            <a:pPr indent="0" marL="0">
+              <a:lnSpc>
+                <a:spcPct val="105000"/>
+              </a:lnSpc>
+              <a:spcAft>
+                <a:spcPts val="300"/>
+              </a:spcAft>
+              <a:buNone/>
+            </a:pPr>
+            <a:r>
+              <a:rPr lang="en-US" sz="950" dirty="0">
+                <a:solidFill>
+                  <a:srgbClr val="0F1B2D"/>
+                </a:solidFill>
+                <a:latin typeface="Calibri" pitchFamily="34" charset="0"/>
+                <a:ea typeface="Calibri" pitchFamily="34" charset="-122"/>
+                <a:cs typeface="Calibri" pitchFamily="34" charset="-120"/>
+              </a:rPr>
+              <a:t>Kimi-Audio technical report. </a:t>
+            </a:r>
+            <a:pPr indent="0" marL="0">
+              <a:lnSpc>
+                <a:spcPct val="105000"/>
+              </a:lnSpc>
+              <a:spcAft>
+                <a:spcPts val="300"/>
+              </a:spcAft>
+              <a:buNone/>
+            </a:pPr>
+            <a:r>
+              <a:rPr lang="en-US" sz="950" i="1" dirty="0">
+                <a:solidFill>
+                  <a:srgbClr val="5B6B7F"/>
+                </a:solidFill>
+                <a:latin typeface="Calibri" pitchFamily="34" charset="0"/>
+                <a:ea typeface="Calibri" pitchFamily="34" charset="-122"/>
+                <a:cs typeface="Calibri" pitchFamily="34" charset="-120"/>
+              </a:rPr>
+              <a:t>arXiv:2504.18425, 2025</a:t>
+            </a:r>
+            <a:endParaRPr lang="en-US" sz="950" dirty="0"/>
+          </a:p>
+          <a:p>
+            <a:pPr indent="0" marL="0">
+              <a:lnSpc>
+                <a:spcPct val="105000"/>
+              </a:lnSpc>
+              <a:spcAft>
+                <a:spcPts val="300"/>
+              </a:spcAft>
+              <a:buNone/>
+            </a:pPr>
+            <a:r>
+              <a:rPr lang="en-US" sz="950" b="1" dirty="0">
+                <a:solidFill>
+                  <a:srgbClr val="0B7F8A"/>
+                </a:solidFill>
+                <a:latin typeface="Calibri" pitchFamily="34" charset="0"/>
+                <a:ea typeface="Calibri" pitchFamily="34" charset="-122"/>
+                <a:cs typeface="Calibri" pitchFamily="34" charset="-120"/>
+              </a:rPr>
+              <a:t>[24]  </a:t>
+            </a:r>
+            <a:pPr indent="0" marL="0">
+              <a:lnSpc>
+                <a:spcPct val="105000"/>
+              </a:lnSpc>
+              <a:spcAft>
+                <a:spcPts val="300"/>
+              </a:spcAft>
+              <a:buNone/>
+            </a:pPr>
+            <a:r>
+              <a:rPr lang="en-US" sz="950" dirty="0">
+                <a:solidFill>
+                  <a:srgbClr val="1B2A41"/>
+                </a:solidFill>
+                <a:latin typeface="Calibri" pitchFamily="34" charset="0"/>
+                <a:ea typeface="Calibri" pitchFamily="34" charset="-122"/>
+                <a:cs typeface="Calibri" pitchFamily="34" charset="-120"/>
+              </a:rPr>
+              <a:t>Xu, Guo, Hu, et al. </a:t>
+            </a:r>
+            <a:pPr indent="0" marL="0">
+              <a:lnSpc>
+                <a:spcPct val="105000"/>
+              </a:lnSpc>
+              <a:spcAft>
+                <a:spcPts val="300"/>
+              </a:spcAft>
+              <a:buNone/>
+            </a:pPr>
+            <a:r>
+              <a:rPr lang="en-US" sz="950" dirty="0">
+                <a:solidFill>
+                  <a:srgbClr val="0F1B2D"/>
+                </a:solidFill>
+                <a:latin typeface="Calibri" pitchFamily="34" charset="0"/>
+                <a:ea typeface="Calibri" pitchFamily="34" charset="-122"/>
+                <a:cs typeface="Calibri" pitchFamily="34" charset="-120"/>
+              </a:rPr>
+              <a:t>Qwen3-Omni technical report. </a:t>
+            </a:r>
+            <a:pPr indent="0" marL="0">
+              <a:lnSpc>
+                <a:spcPct val="105000"/>
+              </a:lnSpc>
+              <a:spcAft>
+                <a:spcPts val="300"/>
+              </a:spcAft>
+              <a:buNone/>
+            </a:pPr>
+            <a:r>
+              <a:rPr lang="en-US" sz="950" i="1" dirty="0">
+                <a:solidFill>
+                  <a:srgbClr val="5B6B7F"/>
+                </a:solidFill>
+                <a:latin typeface="Calibri" pitchFamily="34" charset="0"/>
+                <a:ea typeface="Calibri" pitchFamily="34" charset="-122"/>
+                <a:cs typeface="Calibri" pitchFamily="34" charset="-120"/>
+              </a:rPr>
+              <a:t>arXiv:2509.17765, 2025</a:t>
+            </a:r>
+            <a:endParaRPr lang="en-US" sz="950" dirty="0"/>
+          </a:p>
+          <a:p>
+            <a:pPr indent="0" marL="0">
+              <a:lnSpc>
+                <a:spcPct val="105000"/>
+              </a:lnSpc>
+              <a:spcAft>
+                <a:spcPts val="300"/>
+              </a:spcAft>
+              <a:buNone/>
+            </a:pPr>
+            <a:r>
+              <a:rPr lang="en-US" sz="950" b="1" dirty="0">
+                <a:solidFill>
+                  <a:srgbClr val="0B7F8A"/>
+                </a:solidFill>
+                <a:latin typeface="Calibri" pitchFamily="34" charset="0"/>
+                <a:ea typeface="Calibri" pitchFamily="34" charset="-122"/>
+                <a:cs typeface="Calibri" pitchFamily="34" charset="-120"/>
+              </a:rPr>
+              <a:t>[25]  </a:t>
+            </a:r>
+            <a:pPr indent="0" marL="0">
+              <a:lnSpc>
+                <a:spcPct val="105000"/>
+              </a:lnSpc>
+              <a:spcAft>
+                <a:spcPts val="300"/>
+              </a:spcAft>
+              <a:buNone/>
+            </a:pPr>
+            <a:r>
+              <a:rPr lang="en-US" sz="950" dirty="0">
+                <a:solidFill>
+                  <a:srgbClr val="1B2A41"/>
+                </a:solidFill>
+                <a:latin typeface="Calibri" pitchFamily="34" charset="0"/>
+                <a:ea typeface="Calibri" pitchFamily="34" charset="-122"/>
+                <a:cs typeface="Calibri" pitchFamily="34" charset="-120"/>
+              </a:rPr>
+              <a:t>Radford, Kim, Xu, Brockman, McLeavey, Sutskever. </a:t>
+            </a:r>
+            <a:pPr indent="0" marL="0">
+              <a:lnSpc>
+                <a:spcPct val="105000"/>
+              </a:lnSpc>
+              <a:spcAft>
+                <a:spcPts val="300"/>
+              </a:spcAft>
+              <a:buNone/>
+            </a:pPr>
+            <a:r>
+              <a:rPr lang="en-US" sz="950" dirty="0">
+                <a:solidFill>
+                  <a:srgbClr val="0F1B2D"/>
+                </a:solidFill>
+                <a:latin typeface="Calibri" pitchFamily="34" charset="0"/>
+                <a:ea typeface="Calibri" pitchFamily="34" charset="-122"/>
+                <a:cs typeface="Calibri" pitchFamily="34" charset="-120"/>
+              </a:rPr>
+              <a:t>Robust speech recognition via large-scale weak supervision (Whisper). </a:t>
+            </a:r>
+            <a:pPr indent="0" marL="0">
+              <a:lnSpc>
+                <a:spcPct val="105000"/>
+              </a:lnSpc>
+              <a:spcAft>
+                <a:spcPts val="300"/>
+              </a:spcAft>
+              <a:buNone/>
+            </a:pPr>
+            <a:r>
+              <a:rPr lang="en-US" sz="950" i="1" dirty="0">
+                <a:solidFill>
+                  <a:srgbClr val="5B6B7F"/>
+                </a:solidFill>
+                <a:latin typeface="Calibri" pitchFamily="34" charset="0"/>
+                <a:ea typeface="Calibri" pitchFamily="34" charset="-122"/>
+                <a:cs typeface="Calibri" pitchFamily="34" charset="-120"/>
+              </a:rPr>
+              <a:t>ICML 2023</a:t>
+            </a:r>
+            <a:endParaRPr lang="en-US" sz="950" dirty="0"/>
+          </a:p>
+          <a:p>
+            <a:pPr indent="0" marL="0">
+              <a:lnSpc>
+                <a:spcPct val="105000"/>
+              </a:lnSpc>
+              <a:spcAft>
+                <a:spcPts val="300"/>
+              </a:spcAft>
+              <a:buNone/>
+            </a:pPr>
+            <a:r>
+              <a:rPr lang="en-US" sz="950" b="1" dirty="0">
+                <a:solidFill>
+                  <a:srgbClr val="0B7F8A"/>
+                </a:solidFill>
+                <a:latin typeface="Calibri" pitchFamily="34" charset="0"/>
+                <a:ea typeface="Calibri" pitchFamily="34" charset="-122"/>
+                <a:cs typeface="Calibri" pitchFamily="34" charset="-120"/>
+              </a:rPr>
+              <a:t>[26]  </a:t>
+            </a:r>
+            <a:pPr indent="0" marL="0">
+              <a:lnSpc>
+                <a:spcPct val="105000"/>
+              </a:lnSpc>
+              <a:spcAft>
+                <a:spcPts val="300"/>
+              </a:spcAft>
+              <a:buNone/>
+            </a:pPr>
+            <a:r>
+              <a:rPr lang="en-US" sz="950" dirty="0">
+                <a:solidFill>
+                  <a:srgbClr val="1B2A41"/>
+                </a:solidFill>
+                <a:latin typeface="Calibri" pitchFamily="34" charset="0"/>
+                <a:ea typeface="Calibri" pitchFamily="34" charset="-122"/>
+                <a:cs typeface="Calibri" pitchFamily="34" charset="-120"/>
+              </a:rPr>
+              <a:t>Yang, Li, Yang, et al. </a:t>
+            </a:r>
+            <a:pPr indent="0" marL="0">
+              <a:lnSpc>
+                <a:spcPct val="105000"/>
+              </a:lnSpc>
+              <a:spcAft>
+                <a:spcPts val="300"/>
+              </a:spcAft>
+              <a:buNone/>
+            </a:pPr>
+            <a:r>
+              <a:rPr lang="en-US" sz="950" dirty="0">
+                <a:solidFill>
+                  <a:srgbClr val="0F1B2D"/>
+                </a:solidFill>
+                <a:latin typeface="Calibri" pitchFamily="34" charset="0"/>
+                <a:ea typeface="Calibri" pitchFamily="34" charset="-122"/>
+                <a:cs typeface="Calibri" pitchFamily="34" charset="-120"/>
+              </a:rPr>
+              <a:t>Qwen3 technical report. </a:t>
+            </a:r>
+            <a:pPr indent="0" marL="0">
+              <a:lnSpc>
+                <a:spcPct val="105000"/>
+              </a:lnSpc>
+              <a:spcAft>
+                <a:spcPts val="300"/>
+              </a:spcAft>
+              <a:buNone/>
+            </a:pPr>
+            <a:r>
+              <a:rPr lang="en-US" sz="950" i="1" dirty="0">
+                <a:solidFill>
+                  <a:srgbClr val="5B6B7F"/>
+                </a:solidFill>
+                <a:latin typeface="Calibri" pitchFamily="34" charset="0"/>
+                <a:ea typeface="Calibri" pitchFamily="34" charset="-122"/>
+                <a:cs typeface="Calibri" pitchFamily="34" charset="-120"/>
+              </a:rPr>
+              <a:t>arXiv:2505.09388, 2025</a:t>
+            </a:r>
+            <a:endParaRPr lang="en-US" sz="950" dirty="0"/>
+          </a:p>
+          <a:p>
+            <a:pPr indent="0" marL="0">
+              <a:lnSpc>
+                <a:spcPct val="105000"/>
+              </a:lnSpc>
+              <a:spcAft>
+                <a:spcPts val="300"/>
+              </a:spcAft>
+              <a:buNone/>
+            </a:pPr>
+            <a:r>
+              <a:rPr lang="en-US" sz="950" b="1" dirty="0">
+                <a:solidFill>
+                  <a:srgbClr val="0B7F8A"/>
+                </a:solidFill>
+                <a:latin typeface="Calibri" pitchFamily="34" charset="0"/>
+                <a:ea typeface="Calibri" pitchFamily="34" charset="-122"/>
+                <a:cs typeface="Calibri" pitchFamily="34" charset="-120"/>
+              </a:rPr>
+              <a:t>[27]  </a:t>
+            </a:r>
+            <a:pPr indent="0" marL="0">
+              <a:lnSpc>
+                <a:spcPct val="105000"/>
+              </a:lnSpc>
+              <a:spcAft>
+                <a:spcPts val="300"/>
+              </a:spcAft>
+              <a:buNone/>
+            </a:pPr>
+            <a:r>
+              <a:rPr lang="en-US" sz="950" dirty="0">
+                <a:solidFill>
+                  <a:srgbClr val="1B2A41"/>
+                </a:solidFill>
+                <a:latin typeface="Calibri" pitchFamily="34" charset="0"/>
+                <a:ea typeface="Calibri" pitchFamily="34" charset="-122"/>
+                <a:cs typeface="Calibri" pitchFamily="34" charset="-120"/>
+              </a:rPr>
+              <a:t>Kamath, Ferret, Pathak, et al. </a:t>
+            </a:r>
+            <a:pPr indent="0" marL="0">
+              <a:lnSpc>
+                <a:spcPct val="105000"/>
+              </a:lnSpc>
+              <a:spcAft>
+                <a:spcPts val="300"/>
+              </a:spcAft>
+              <a:buNone/>
+            </a:pPr>
+            <a:r>
+              <a:rPr lang="en-US" sz="950" dirty="0">
+                <a:solidFill>
+                  <a:srgbClr val="0F1B2D"/>
+                </a:solidFill>
+                <a:latin typeface="Calibri" pitchFamily="34" charset="0"/>
+                <a:ea typeface="Calibri" pitchFamily="34" charset="-122"/>
+                <a:cs typeface="Calibri" pitchFamily="34" charset="-120"/>
+              </a:rPr>
+              <a:t>Gemma 3 technical report. </a:t>
+            </a:r>
+            <a:pPr indent="0" marL="0">
+              <a:lnSpc>
+                <a:spcPct val="105000"/>
+              </a:lnSpc>
+              <a:spcAft>
+                <a:spcPts val="300"/>
+              </a:spcAft>
+              <a:buNone/>
+            </a:pPr>
+            <a:r>
+              <a:rPr lang="en-US" sz="950" i="1" dirty="0">
+                <a:solidFill>
+                  <a:srgbClr val="5B6B7F"/>
+                </a:solidFill>
+                <a:latin typeface="Calibri" pitchFamily="34" charset="0"/>
+                <a:ea typeface="Calibri" pitchFamily="34" charset="-122"/>
+                <a:cs typeface="Calibri" pitchFamily="34" charset="-120"/>
+              </a:rPr>
+              <a:t>arXiv:2503.19786, 2025</a:t>
+            </a:r>
+            <a:endParaRPr lang="en-US" sz="950" dirty="0"/>
+          </a:p>
+          <a:p>
+            <a:pPr indent="0" marL="0">
+              <a:lnSpc>
+                <a:spcPct val="105000"/>
+              </a:lnSpc>
+              <a:spcAft>
+                <a:spcPts val="300"/>
+              </a:spcAft>
+              <a:buNone/>
+            </a:pPr>
+            <a:r>
+              <a:rPr lang="en-US" sz="950" b="1" dirty="0">
+                <a:solidFill>
+                  <a:srgbClr val="0B7F8A"/>
+                </a:solidFill>
+                <a:latin typeface="Calibri" pitchFamily="34" charset="0"/>
+                <a:ea typeface="Calibri" pitchFamily="34" charset="-122"/>
+                <a:cs typeface="Calibri" pitchFamily="34" charset="-120"/>
+              </a:rPr>
+              <a:t>[28]  </a:t>
+            </a:r>
+            <a:pPr indent="0" marL="0">
+              <a:lnSpc>
+                <a:spcPct val="105000"/>
+              </a:lnSpc>
+              <a:spcAft>
+                <a:spcPts val="300"/>
+              </a:spcAft>
+              <a:buNone/>
+            </a:pPr>
+            <a:r>
+              <a:rPr lang="en-US" sz="950" dirty="0">
+                <a:solidFill>
+                  <a:srgbClr val="1B2A41"/>
+                </a:solidFill>
+                <a:latin typeface="Calibri" pitchFamily="34" charset="0"/>
+                <a:ea typeface="Calibri" pitchFamily="34" charset="-122"/>
+                <a:cs typeface="Calibri" pitchFamily="34" charset="-120"/>
+              </a:rPr>
+              <a:t>Reddy, Beyrami, Pool, Cutler, Srinivasan, Gehrke. </a:t>
+            </a:r>
+            <a:pPr indent="0" marL="0">
+              <a:lnSpc>
+                <a:spcPct val="105000"/>
+              </a:lnSpc>
+              <a:spcAft>
+                <a:spcPts val="300"/>
+              </a:spcAft>
+              <a:buNone/>
+            </a:pPr>
+            <a:r>
+              <a:rPr lang="en-US" sz="950" dirty="0">
+                <a:solidFill>
+                  <a:srgbClr val="0F1B2D"/>
+                </a:solidFill>
+                <a:latin typeface="Calibri" pitchFamily="34" charset="0"/>
+                <a:ea typeface="Calibri" pitchFamily="34" charset="-122"/>
+                <a:cs typeface="Calibri" pitchFamily="34" charset="-120"/>
+              </a:rPr>
+              <a:t>A scalable noisy speech dataset and online subjective test framework (MS-SNSD). </a:t>
+            </a:r>
+            <a:pPr indent="0" marL="0">
+              <a:lnSpc>
+                <a:spcPct val="105000"/>
+              </a:lnSpc>
+              <a:spcAft>
+                <a:spcPts val="300"/>
+              </a:spcAft>
+              <a:buNone/>
+            </a:pPr>
+            <a:r>
+              <a:rPr lang="en-US" sz="950" i="1" dirty="0">
+                <a:solidFill>
+                  <a:srgbClr val="5B6B7F"/>
+                </a:solidFill>
+                <a:latin typeface="Calibri" pitchFamily="34" charset="0"/>
+                <a:ea typeface="Calibri" pitchFamily="34" charset="-122"/>
+                <a:cs typeface="Calibri" pitchFamily="34" charset="-120"/>
+              </a:rPr>
+              <a:t>arXiv:1909.08050, 2019</a:t>
+            </a:r>
+            <a:endParaRPr lang="en-US" sz="950" dirty="0"/>
+          </a:p>
+        </p:txBody>
+      </p:sp>
+      <p:sp>
+        <p:nvSpPr>
+          <p:cNvPr id="16" name="Text 13"/>
+          <p:cNvSpPr txBox="1"/>
+          <p:nvPr/>
+        </p:nvSpPr>
+        <p:spPr>
+          <a:xfrm>
+            <a:off x="548640" y="6199632"/>
+            <a:ext cx="11064240" cy="256032"/>
+          </a:xfrm>
+          <a:prstGeom prst="rect">
+            <a:avLst/>
+          </a:prstGeom>
+          <a:noFill/>
+          <a:ln/>
+        </p:spPr>
+        <p:txBody>
+          <a:bodyPr wrap="square" lIns="0" tIns="0" rIns="0" bIns="0" rtlCol="0" anchor="t"/>
+          <a:lstStyle/>
+          <a:p>
+            <a:pPr indent="0" marL="0">
+              <a:buNone/>
+            </a:pPr>
+            <a:r>
+              <a:rPr lang="en-US" sz="1000" i="1" dirty="0">
+                <a:solidFill>
+                  <a:srgbClr val="5B6B7F"/>
+                </a:solidFill>
+                <a:latin typeface="Calibri" pitchFamily="34" charset="0"/>
+                <a:ea typeface="Calibri" pitchFamily="34" charset="-122"/>
+                <a:cs typeface="Calibri" pitchFamily="34" charset="-120"/>
+              </a:rPr>
+              <a:t>Full bibliography in the paper: arXiv:2604.22821</a:t>
+            </a:r>
+            <a:endParaRPr lang="en-US" sz="1000" dirty="0"/>
+          </a:p>
+        </p:txBody>
+      </p:sp>
+    </p:spTree>
+  </p:cSld>
+  <p:clrMapOvr>
+    <a:masterClrMapping/>
+  </p:clrMapOvr>
+</p:sld>
+</file>
+
 <file path=ppt/slides/slide3.xml><?xml version="1.0" encoding="utf-8"?>
 <p:sld xmlns:a="http://schemas.openxmlformats.org/drawingml/2006/main" xmlns:r="http://schemas.openxmlformats.org/officeDocument/2006/relationships" xmlns:p="http://schemas.openxmlformats.org/presentationml/2006/main">
   <p:cSld name="Slide 3">

--- a/presentation/Audio2Tool_Interspeech2026_Oral.pptx
+++ b/presentation/Audio2Tool_Interspeech2026_Oral.pptx
@@ -7414,7 +7414,7 @@
                 <a:ea typeface="Calibri" pitchFamily="34" charset="-122"/>
                 <a:cs typeface="Calibri" pitchFamily="34" charset="-120"/>
               </a:rPr>
-              <a:t>SPGISpeech 2.0 · Emilia-YODAS · 3D-Speaker · VoxPopuli</a:t>
+              <a:t>SPGISpeech 2.0 [15] · Emilia-YODAS [16] · 3D-Speaker [17] · VoxPopuli [18]</a:t>
             </a:r>
             <a:endParaRPr lang="en-US" sz="1200" dirty="0"/>
           </a:p>
@@ -7772,7 +7772,7 @@
                 <a:ea typeface="Calibri" pitchFamily="34" charset="-122"/>
                 <a:cs typeface="Calibri" pitchFamily="34" charset="-120"/>
               </a:rPr>
-              <a:t>Qwen3-TTS and CosyVoice-3 render every query in m sampled voices</a:t>
+              <a:t>Qwen3-TTS [19] and CosyVoice-3 [20] render every query in m sampled voices</a:t>
             </a:r>
             <a:endParaRPr lang="en-US" sz="1200" dirty="0"/>
           </a:p>
@@ -8019,9 +8019,9 @@
             <a:tbl>
               <a:tblPr/>
               <a:tblGrid>
-                <a:gridCol w="1417320"/>
-                <a:gridCol w="1051560"/>
-                <a:gridCol w="1673352"/>
+                <a:gridCol w="1691640"/>
+                <a:gridCol w="914400"/>
+                <a:gridCol w="1536192"/>
                 <a:gridCol w="868680"/>
               </a:tblGrid>
               <a:tr h="384048">
@@ -8316,7 +8316,7 @@
                           <a:ea typeface="Calibri" pitchFamily="34" charset="-122"/>
                           <a:cs typeface="Calibri" pitchFamily="34" charset="-120"/>
                         </a:rPr>
-                        <a:t>SPGISpeech 2.0</a:t>
+                        <a:t>SPGISpeech 2.0 [15]</a:t>
                       </a:r>
                       <a:endParaRPr lang="en-US" sz="1250" dirty="0">
                         <a:latin typeface="Calibri" charset="0"/>
@@ -8446,7 +8446,7 @@
                           <a:ea typeface="Calibri" pitchFamily="34" charset="-122"/>
                           <a:cs typeface="Calibri" pitchFamily="34" charset="-120"/>
                         </a:rPr>
-                        <a:t>US, Asia, Latin America</a:t>
+                        <a:t>US, Asia, LatAm</a:t>
                       </a:r>
                       <a:endParaRPr lang="en-US" sz="1250" dirty="0">
                         <a:latin typeface="Calibri" charset="0"/>
@@ -8578,7 +8578,7 @@
                           <a:ea typeface="Calibri" pitchFamily="34" charset="-122"/>
                           <a:cs typeface="Calibri" pitchFamily="34" charset="-120"/>
                         </a:rPr>
-                        <a:t>Emilia-YODAS</a:t>
+                        <a:t>Emilia-YODAS [16]</a:t>
                       </a:r>
                       <a:endParaRPr lang="en-US" sz="1250" dirty="0">
                         <a:latin typeface="Calibri" charset="0"/>
@@ -8840,7 +8840,7 @@
                           <a:ea typeface="Calibri" pitchFamily="34" charset="-122"/>
                           <a:cs typeface="Calibri" pitchFamily="34" charset="-120"/>
                         </a:rPr>
-                        <a:t>3D-Speaker</a:t>
+                        <a:t>3D-Speaker [17]</a:t>
                       </a:r>
                       <a:endParaRPr lang="en-US" sz="1250" dirty="0">
                         <a:latin typeface="Calibri" charset="0"/>
@@ -9102,7 +9102,7 @@
                           <a:ea typeface="Calibri" pitchFamily="34" charset="-122"/>
                           <a:cs typeface="Calibri" pitchFamily="34" charset="-120"/>
                         </a:rPr>
-                        <a:t>VoxPopuli</a:t>
+                        <a:t>VoxPopuli [18]</a:t>
                       </a:r>
                       <a:endParaRPr lang="en-US" sz="1250" dirty="0">
                         <a:latin typeface="Calibri" charset="0"/>
@@ -10318,7 +10318,7 @@
                 <a:ea typeface="Calibri" pitchFamily="34" charset="-122"/>
                 <a:cs typeface="Calibri" pitchFamily="34" charset="-120"/>
               </a:rPr>
-              <a:t>Qwen3-Omni-30B  ·  Qwen2.5-Omni-7B  ·  Kimi-Audio-7B</a:t>
+              <a:t>Qwen3-Omni-30B [24]  ·  Qwen2.5-Omni-7B [24]  ·  Kimi-Audio-7B [23]</a:t>
             </a:r>
             <a:endParaRPr lang="en-US" sz="1350" dirty="0"/>
           </a:p>
@@ -10338,7 +10338,7 @@
                 <a:ea typeface="Calibri" pitchFamily="34" charset="-122"/>
                 <a:cs typeface="Calibri" pitchFamily="34" charset="-120"/>
               </a:rPr>
-              <a:t>Step-Audio-2-7B  ·  Audio-Flamingo-3-8B</a:t>
+              <a:t>Step-Audio-2-7B [21]  ·  Audio-Flamingo-3-8B [22]</a:t>
             </a:r>
             <a:endParaRPr lang="en-US" sz="1350" dirty="0"/>
           </a:p>
@@ -10492,7 +10492,7 @@
                 <a:ea typeface="Calibri" pitchFamily="34" charset="-122"/>
                 <a:cs typeface="Calibri" pitchFamily="34" charset="-120"/>
               </a:rPr>
-              <a:t>Cascaded  ·  audio → Whisper-v3 → text LLM</a:t>
+              <a:t>Cascaded  ·  audio → Whisper-v3 [25] → text LLM</a:t>
             </a:r>
             <a:endParaRPr lang="en-US" sz="1500" dirty="0"/>
           </a:p>
@@ -10531,7 +10531,7 @@
                 <a:ea typeface="Calibri" pitchFamily="34" charset="-122"/>
                 <a:cs typeface="Calibri" pitchFamily="34" charset="-120"/>
               </a:rPr>
-              <a:t>Qwen3 1.7B / 4B / 8B  ·  Gemma-3 12B / 27B</a:t>
+              <a:t>Qwen3 1.7B / 4B / 8B [26]  ·  Gemma-3 12B / 27B [27]</a:t>
             </a:r>
             <a:endParaRPr lang="en-US" sz="1350" dirty="0"/>
           </a:p>
@@ -13948,7 +13948,7 @@
                 <a:ea typeface="Calibri" pitchFamily="34" charset="-122"/>
                 <a:cs typeface="Calibri" pitchFamily="34" charset="-120"/>
               </a:rPr>
-              <a:t>Babble, mechanical hum, impulsive (MS-SNSD) at +15, +5 and −5 dB</a:t>
+              <a:t>Babble, mechanical hum, impulsive (MS-SNSD [28]) at +15, +5 and −5 dB</a:t>
             </a:r>
             <a:endParaRPr lang="en-US" sz="1250" dirty="0"/>
           </a:p>
@@ -20509,7 +20509,7 @@
                           <a:ea typeface="Calibri" pitchFamily="34" charset="-122"/>
                           <a:cs typeface="Calibri" pitchFamily="34" charset="-120"/>
                         </a:rPr>
-                        <a:t>ATIS</a:t>
+                        <a:t>ATIS [6]</a:t>
                       </a:r>
                       <a:endParaRPr lang="en-US" sz="1400" dirty="0">
                         <a:latin typeface="Calibri" charset="0"/>
@@ -20901,7 +20901,7 @@
                           <a:ea typeface="Calibri" pitchFamily="34" charset="-122"/>
                           <a:cs typeface="Calibri" pitchFamily="34" charset="-120"/>
                         </a:rPr>
-                        <a:t>SNIPS</a:t>
+                        <a:t>SNIPS [12]</a:t>
                       </a:r>
                       <a:endParaRPr lang="en-US" sz="1400" dirty="0">
                         <a:latin typeface="Calibri" charset="0"/>
@@ -21685,7 +21685,7 @@
                           <a:ea typeface="Calibri" pitchFamily="34" charset="-122"/>
                           <a:cs typeface="Calibri" pitchFamily="34" charset="-120"/>
                         </a:rPr>
-                        <a:t>SLURP</a:t>
+                        <a:t>SLURP [7]</a:t>
                       </a:r>
                       <a:endParaRPr lang="en-US" sz="1400" dirty="0">
                         <a:latin typeface="Calibri" charset="0"/>
@@ -22077,7 +22077,7 @@
                           <a:ea typeface="Calibri" pitchFamily="34" charset="-122"/>
                           <a:cs typeface="Calibri" pitchFamily="34" charset="-120"/>
                         </a:rPr>
-                        <a:t>MixATIS</a:t>
+                        <a:t>MixATIS [13]</a:t>
                       </a:r>
                       <a:endParaRPr lang="en-US" sz="1400" dirty="0">
                         <a:latin typeface="Calibri" charset="0"/>
@@ -22469,7 +22469,7 @@
                           <a:ea typeface="Calibri" pitchFamily="34" charset="-122"/>
                           <a:cs typeface="Calibri" pitchFamily="34" charset="-120"/>
                         </a:rPr>
-                        <a:t>MixSNIPS</a:t>
+                        <a:t>MixSNIPS [14]</a:t>
                       </a:r>
                       <a:endParaRPr lang="en-US" sz="1400" dirty="0">
                         <a:latin typeface="Calibri" charset="0"/>
@@ -22861,7 +22861,7 @@
                           <a:ea typeface="Calibri" pitchFamily="34" charset="-122"/>
                           <a:cs typeface="Calibri" pitchFamily="34" charset="-120"/>
                         </a:rPr>
-                        <a:t>MAC-SLU</a:t>
+                        <a:t>MAC-SLU [9]</a:t>
                       </a:r>
                       <a:endParaRPr lang="en-US" sz="1400" dirty="0">
                         <a:latin typeface="Calibri" charset="0"/>
@@ -24385,7 +24385,7 @@
                 <a:ea typeface="Calibri" pitchFamily="34" charset="-122"/>
                 <a:cs typeface="Calibri" pitchFamily="34" charset="-120"/>
               </a:rPr>
-              <a:t>Qwen3-TTS · CosyVoice-3, zero-shot voice cloning; noise mixed per Algorithm 1</a:t>
+              <a:t>Qwen3-TTS [19] · CosyVoice-3 [20], zero-shot voice cloning; noise mixed per Algorithm 1</a:t>
             </a:r>
             <a:endParaRPr lang="en-US" sz="1300" dirty="0"/>
           </a:p>
@@ -27169,7 +27169,7 @@
                 <a:ea typeface="Calibri" pitchFamily="34" charset="-122"/>
                 <a:cs typeface="Calibri" pitchFamily="34" charset="-120"/>
               </a:rPr>
-              <a:t>Full bibliography in the paper: arXiv:2604.22821</a:t>
+              <a:t>Numbers match the bracketed citations on the earlier slides and in the paper (arXiv:2604.22821).</a:t>
             </a:r>
             <a:endParaRPr lang="en-US" sz="1000" dirty="0"/>
           </a:p>
@@ -30205,12 +30205,12 @@
             <a:tbl>
               <a:tblPr/>
               <a:tblGrid>
-                <a:gridCol w="3044952"/>
-                <a:gridCol w="1463040"/>
-                <a:gridCol w="1737360"/>
-                <a:gridCol w="1737360"/>
-                <a:gridCol w="1554480"/>
-                <a:gridCol w="1554480"/>
+                <a:gridCol w="3337560"/>
+                <a:gridCol w="1371600"/>
+                <a:gridCol w="1691640"/>
+                <a:gridCol w="1691640"/>
+                <a:gridCol w="1499616"/>
+                <a:gridCol w="1499616"/>
               </a:tblGrid>
               <a:tr h="502920">
                 <a:tc>
@@ -30650,7 +30650,7 @@
                           <a:ea typeface="Calibri" pitchFamily="34" charset="-122"/>
                           <a:cs typeface="Calibri" pitchFamily="34" charset="-120"/>
                         </a:rPr>
-                        <a:t>BFCL, ComplexFuncBench</a:t>
+                        <a:t>BFCL [3], ComplexFuncBench [2]</a:t>
                       </a:r>
                       <a:endParaRPr lang="en-US" sz="1300" dirty="0">
                         <a:latin typeface="Calibri" charset="0"/>
@@ -31081,7 +31081,7 @@
                           <a:ea typeface="Calibri" pitchFamily="34" charset="-122"/>
                           <a:cs typeface="Calibri" pitchFamily="34" charset="-120"/>
                         </a:rPr>
-                        <a:t>SLURP, STOP, MAC-SLU</a:t>
+                        <a:t>SLURP [7], STOP [8], MAC-SLU [9]</a:t>
                       </a:r>
                       <a:endParaRPr lang="en-US" sz="1300" dirty="0">
                         <a:latin typeface="Calibri" charset="0"/>
@@ -31512,7 +31512,7 @@
                           <a:ea typeface="Calibri" pitchFamily="34" charset="-122"/>
                           <a:cs typeface="Calibri" pitchFamily="34" charset="-120"/>
                         </a:rPr>
-                        <a:t>BFCL-Audio, VoiceAgentBench, MFCL</a:t>
+                        <a:t>BFCL-Audio [10], VoiceAgentBench [5], MFCL [11]</a:t>
                       </a:r>
                       <a:endParaRPr lang="en-US" sz="1300" dirty="0">
                         <a:latin typeface="Calibri" charset="0"/>
@@ -32386,7 +32386,7 @@
                 <a:ea typeface="Calibri" pitchFamily="34" charset="-122"/>
                 <a:cs typeface="Calibri" pitchFamily="34" charset="-120"/>
               </a:rPr>
-              <a:t>Audio2Tool keeps the executable-call formalism of BFCL, but makes the input spoken, acoustically diverse, and organised so each tier isolates a distinct failure mode.</a:t>
+              <a:t>Audio2Tool keeps the executable-call formalism of BFCL [3], but makes the input spoken, acoustically diverse, and organised so each tier isolates a distinct failure mode.</a:t>
             </a:r>
             <a:endParaRPr lang="en-US" sz="1600" dirty="0"/>
           </a:p>
